--- a/public/documents/business-simulation/round-4/section-c/section-c-round4-universe1-debrief.pptx
+++ b/public/documents/business-simulation/round-4/section-c/section-c-round4-universe1-debrief.pptx
@@ -509,6 +509,10 @@
           </p:nvPr>
         </p:nvSpPr>
         <p:spPr/>
+        <p:txBody>
+          <a:bodyPr/>
+          <a:p/>
+        </p:txBody>
       </p:sp>
       <p:sp>
         <p:nvSpPr>
@@ -525,10 +529,6 @@
           <a:bodyPr/>
           <a:lstStyle/>
           <a:p>
-            <a:r>
-              <a:rPr lang="en-US" dirty="0"/>
-              <a:t>Opening frame. Ask the class to treat rank as the entry point, not the answer. The discussion will move from results to causal mechanisms and then to Round 5 decision rules.</a:t>
-            </a:r>
             <a:endParaRPr lang="en-US" dirty="0"/>
           </a:p>
         </p:txBody>
@@ -548,10 +548,6 @@
           <a:bodyPr/>
           <a:lstStyle/>
           <a:p>
-            <a:fld id="{F7021451-1387-4CA6-816F-3879F97B5CBC}" type="slidenum">
-              <a:rPr lang="en-US"/>
-              <a:t>1</a:t>
-            </a:fld>
             <a:endParaRPr lang="en-US"/>
           </a:p>
         </p:txBody>
@@ -597,6 +593,10 @@
           </p:nvPr>
         </p:nvSpPr>
         <p:spPr/>
+        <p:txBody>
+          <a:bodyPr/>
+          <a:p/>
+        </p:txBody>
       </p:sp>
       <p:sp>
         <p:nvSpPr>
@@ -613,10 +613,6 @@
           <a:bodyPr/>
           <a:lstStyle/>
           <a:p>
-            <a:r>
-              <a:rPr lang="en-US" dirty="0"/>
-              <a:t>Ask teams to identify not only where they have share, but where they earn returns. Regional share is only useful if it creates contribution and capacity fit.</a:t>
-            </a:r>
             <a:endParaRPr lang="en-US" dirty="0"/>
           </a:p>
         </p:txBody>
@@ -636,10 +632,6 @@
           <a:bodyPr/>
           <a:lstStyle/>
           <a:p>
-            <a:fld id="{F7021451-1387-4CA6-816F-3879F97B5CBC}" type="slidenum">
-              <a:rPr lang="en-US"/>
-              <a:t>10</a:t>
-            </a:fld>
             <a:endParaRPr lang="en-US"/>
           </a:p>
         </p:txBody>
@@ -685,6 +677,10 @@
           </p:nvPr>
         </p:nvSpPr>
         <p:spPr/>
+        <p:txBody>
+          <a:bodyPr/>
+          <a:p/>
+        </p:txBody>
       </p:sp>
       <p:sp>
         <p:nvSpPr>
@@ -701,10 +697,6 @@
           <a:bodyPr/>
           <a:lstStyle/>
           <a:p>
-            <a:r>
-              <a:rPr lang="en-US" dirty="0"/>
-              <a:t>Do not let students equate innovation with spending. Ask them to specify the path from R&amp;D to demand and contribution.</a:t>
-            </a:r>
             <a:endParaRPr lang="en-US" dirty="0"/>
           </a:p>
         </p:txBody>
@@ -724,10 +716,6 @@
           <a:bodyPr/>
           <a:lstStyle/>
           <a:p>
-            <a:fld id="{F7021451-1387-4CA6-816F-3879F97B5CBC}" type="slidenum">
-              <a:rPr lang="en-US"/>
-              <a:t>11</a:t>
-            </a:fld>
             <a:endParaRPr lang="en-US"/>
           </a:p>
         </p:txBody>
@@ -773,6 +761,10 @@
           </p:nvPr>
         </p:nvSpPr>
         <p:spPr/>
+        <p:txBody>
+          <a:bodyPr/>
+          <a:p/>
+        </p:txBody>
       </p:sp>
       <p:sp>
         <p:nvSpPr>
@@ -789,10 +781,6 @@
           <a:bodyPr/>
           <a:lstStyle/>
           <a:p>
-            <a:r>
-              <a:rPr lang="en-US" dirty="0"/>
-              <a:t>This is a useful team challenge slide. Ask each team to explain whether its weak ROS is price, cost, R&amp;D or financing related.</a:t>
-            </a:r>
             <a:endParaRPr lang="en-US" dirty="0"/>
           </a:p>
         </p:txBody>
@@ -812,10 +800,6 @@
           <a:bodyPr/>
           <a:lstStyle/>
           <a:p>
-            <a:fld id="{F7021451-1387-4CA6-816F-3879F97B5CBC}" type="slidenum">
-              <a:rPr lang="en-US"/>
-              <a:t>12</a:t>
-            </a:fld>
             <a:endParaRPr lang="en-US"/>
           </a:p>
         </p:txBody>
@@ -861,6 +845,10 @@
           </p:nvPr>
         </p:nvSpPr>
         <p:spPr/>
+        <p:txBody>
+          <a:bodyPr/>
+          <a:p/>
+        </p:txBody>
       </p:sp>
       <p:sp>
         <p:nvSpPr>
@@ -877,10 +865,6 @@
           <a:bodyPr/>
           <a:lstStyle/>
           <a:p>
-            <a:r>
-              <a:rPr lang="en-US" dirty="0"/>
-              <a:t>Emphasize that inventory connects forecasting, pricing, production and cash. A team with profit but poor cash flow may have a timing or inventory problem.</a:t>
-            </a:r>
             <a:endParaRPr lang="en-US" dirty="0"/>
           </a:p>
         </p:txBody>
@@ -900,10 +884,6 @@
           <a:bodyPr/>
           <a:lstStyle/>
           <a:p>
-            <a:fld id="{F7021451-1387-4CA6-816F-3879F97B5CBC}" type="slidenum">
-              <a:rPr lang="en-US"/>
-              <a:t>13</a:t>
-            </a:fld>
             <a:endParaRPr lang="en-US"/>
           </a:p>
         </p:txBody>
@@ -949,6 +929,10 @@
           </p:nvPr>
         </p:nvSpPr>
         <p:spPr/>
+        <p:txBody>
+          <a:bodyPr/>
+          <a:p/>
+        </p:txBody>
       </p:sp>
       <p:sp>
         <p:nvSpPr>
@@ -965,10 +949,6 @@
           <a:bodyPr/>
           <a:lstStyle/>
           <a:p>
-            <a:r>
-              <a:rPr lang="en-US" dirty="0"/>
-              <a:t>Use this slide to explain the connection between financing decisions and TSR. Debt is not automatically bad; unplanned debt and deteriorating credit quality are the problem.</a:t>
-            </a:r>
             <a:endParaRPr lang="en-US" dirty="0"/>
           </a:p>
         </p:txBody>
@@ -988,10 +968,6 @@
           <a:bodyPr/>
           <a:lstStyle/>
           <a:p>
-            <a:fld id="{F7021451-1387-4CA6-816F-3879F97B5CBC}" type="slidenum">
-              <a:rPr lang="en-US"/>
-              <a:t>14</a:t>
-            </a:fld>
             <a:endParaRPr lang="en-US"/>
           </a:p>
         </p:txBody>
@@ -1037,6 +1013,10 @@
           </p:nvPr>
         </p:nvSpPr>
         <p:spPr/>
+        <p:txBody>
+          <a:bodyPr/>
+          <a:p/>
+        </p:txBody>
       </p:sp>
       <p:sp>
         <p:nvSpPr>
@@ -1053,10 +1033,6 @@
           <a:bodyPr/>
           <a:lstStyle/>
           <a:p>
-            <a:r>
-              <a:rPr lang="en-US" dirty="0"/>
-              <a:t>This slide is a synthesis. Invite each team to pick the cell that best explains its result, and the cell it must fix before Round 5.</a:t>
-            </a:r>
             <a:endParaRPr lang="en-US" dirty="0"/>
           </a:p>
         </p:txBody>
@@ -1076,10 +1052,6 @@
           <a:bodyPr/>
           <a:lstStyle/>
           <a:p>
-            <a:fld id="{F7021451-1387-4CA6-816F-3879F97B5CBC}" type="slidenum">
-              <a:rPr lang="en-US"/>
-              <a:t>15</a:t>
-            </a:fld>
             <a:endParaRPr lang="en-US"/>
           </a:p>
         </p:txBody>
@@ -1125,6 +1097,10 @@
           </p:nvPr>
         </p:nvSpPr>
         <p:spPr/>
+        <p:txBody>
+          <a:bodyPr/>
+          <a:p/>
+        </p:txBody>
       </p:sp>
       <p:sp>
         <p:nvSpPr>
@@ -1141,10 +1117,6 @@
           <a:bodyPr/>
           <a:lstStyle/>
           <a:p>
-            <a:r>
-              <a:rPr lang="en-US" dirty="0"/>
-              <a:t>Team profile for Green. Emphasize the distinction between result and learning. Ask the team for one preserved decision and one corrective decision.</a:t>
-            </a:r>
             <a:endParaRPr lang="en-US" dirty="0"/>
           </a:p>
         </p:txBody>
@@ -1164,10 +1136,6 @@
           <a:bodyPr/>
           <a:lstStyle/>
           <a:p>
-            <a:fld id="{F7021451-1387-4CA6-816F-3879F97B5CBC}" type="slidenum">
-              <a:rPr lang="en-US"/>
-              <a:t>16</a:t>
-            </a:fld>
             <a:endParaRPr lang="en-US"/>
           </a:p>
         </p:txBody>
@@ -1213,6 +1181,10 @@
           </p:nvPr>
         </p:nvSpPr>
         <p:spPr/>
+        <p:txBody>
+          <a:bodyPr/>
+          <a:p/>
+        </p:txBody>
       </p:sp>
       <p:sp>
         <p:nvSpPr>
@@ -1229,10 +1201,6 @@
           <a:bodyPr/>
           <a:lstStyle/>
           <a:p>
-            <a:r>
-              <a:rPr lang="en-US" dirty="0"/>
-              <a:t>Team profile for Harshad Mehta Gang. Emphasize the distinction between result and learning. Ask the team for one preserved decision and one corrective decision.</a:t>
-            </a:r>
             <a:endParaRPr lang="en-US" dirty="0"/>
           </a:p>
         </p:txBody>
@@ -1252,10 +1220,6 @@
           <a:bodyPr/>
           <a:lstStyle/>
           <a:p>
-            <a:fld id="{F7021451-1387-4CA6-816F-3879F97B5CBC}" type="slidenum">
-              <a:rPr lang="en-US"/>
-              <a:t>17</a:t>
-            </a:fld>
             <a:endParaRPr lang="en-US"/>
           </a:p>
         </p:txBody>
@@ -1301,6 +1265,10 @@
           </p:nvPr>
         </p:nvSpPr>
         <p:spPr/>
+        <p:txBody>
+          <a:bodyPr/>
+          <a:p/>
+        </p:txBody>
       </p:sp>
       <p:sp>
         <p:nvSpPr>
@@ -1317,10 +1285,6 @@
           <a:bodyPr/>
           <a:lstStyle/>
           <a:p>
-            <a:r>
-              <a:rPr lang="en-US" dirty="0"/>
-              <a:t>Team profile for Lakshmi Chit Fund. Emphasize the distinction between result and learning. Ask the team for one preserved decision and one corrective decision.</a:t>
-            </a:r>
             <a:endParaRPr lang="en-US" dirty="0"/>
           </a:p>
         </p:txBody>
@@ -1340,10 +1304,6 @@
           <a:bodyPr/>
           <a:lstStyle/>
           <a:p>
-            <a:fld id="{F7021451-1387-4CA6-816F-3879F97B5CBC}" type="slidenum">
-              <a:rPr lang="en-US"/>
-              <a:t>18</a:t>
-            </a:fld>
             <a:endParaRPr lang="en-US"/>
           </a:p>
         </p:txBody>
@@ -1389,6 +1349,10 @@
           </p:nvPr>
         </p:nvSpPr>
         <p:spPr/>
+        <p:txBody>
+          <a:bodyPr/>
+          <a:p/>
+        </p:txBody>
       </p:sp>
       <p:sp>
         <p:nvSpPr>
@@ -1405,10 +1369,6 @@
           <a:bodyPr/>
           <a:lstStyle/>
           <a:p>
-            <a:r>
-              <a:rPr lang="en-US" dirty="0"/>
-              <a:t>Team profile for Big Bulls. Emphasize the distinction between result and learning. Ask the team for one preserved decision and one corrective decision.</a:t>
-            </a:r>
             <a:endParaRPr lang="en-US" dirty="0"/>
           </a:p>
         </p:txBody>
@@ -1428,10 +1388,6 @@
           <a:bodyPr/>
           <a:lstStyle/>
           <a:p>
-            <a:fld id="{F7021451-1387-4CA6-816F-3879F97B5CBC}" type="slidenum">
-              <a:rPr lang="en-US"/>
-              <a:t>19</a:t>
-            </a:fld>
             <a:endParaRPr lang="en-US"/>
           </a:p>
         </p:txBody>
@@ -1477,6 +1433,10 @@
           </p:nvPr>
         </p:nvSpPr>
         <p:spPr/>
+        <p:txBody>
+          <a:bodyPr/>
+          <a:p/>
+        </p:txBody>
       </p:sp>
       <p:sp>
         <p:nvSpPr>
@@ -1493,10 +1453,6 @@
           <a:bodyPr/>
           <a:lstStyle/>
           <a:p>
-            <a:r>
-              <a:rPr lang="en-US" dirty="0"/>
-              <a:t>Use this slide to discipline the conversation. Teams must compare like with like, especially when names changed. The ranking metric is cumulative TSR, but the explanation is multi-metric.</a:t>
-            </a:r>
             <a:endParaRPr lang="en-US" dirty="0"/>
           </a:p>
         </p:txBody>
@@ -1516,10 +1472,6 @@
           <a:bodyPr/>
           <a:lstStyle/>
           <a:p>
-            <a:fld id="{F7021451-1387-4CA6-816F-3879F97B5CBC}" type="slidenum">
-              <a:rPr lang="en-US"/>
-              <a:t>2</a:t>
-            </a:fld>
             <a:endParaRPr lang="en-US"/>
           </a:p>
         </p:txBody>
@@ -1565,6 +1517,10 @@
           </p:nvPr>
         </p:nvSpPr>
         <p:spPr/>
+        <p:txBody>
+          <a:bodyPr/>
+          <a:p/>
+        </p:txBody>
       </p:sp>
       <p:sp>
         <p:nvSpPr>
@@ -1581,10 +1537,6 @@
           <a:bodyPr/>
           <a:lstStyle/>
           <a:p>
-            <a:r>
-              <a:rPr lang="en-US" dirty="0"/>
-              <a:t>Team profile for Grey. Emphasize the distinction between result and learning. Ask the team for one preserved decision and one corrective decision.</a:t>
-            </a:r>
             <a:endParaRPr lang="en-US" dirty="0"/>
           </a:p>
         </p:txBody>
@@ -1604,10 +1556,6 @@
           <a:bodyPr/>
           <a:lstStyle/>
           <a:p>
-            <a:fld id="{F7021451-1387-4CA6-816F-3879F97B5CBC}" type="slidenum">
-              <a:rPr lang="en-US"/>
-              <a:t>20</a:t>
-            </a:fld>
             <a:endParaRPr lang="en-US"/>
           </a:p>
         </p:txBody>
@@ -1653,6 +1601,10 @@
           </p:nvPr>
         </p:nvSpPr>
         <p:spPr/>
+        <p:txBody>
+          <a:bodyPr/>
+          <a:p/>
+        </p:txBody>
       </p:sp>
       <p:sp>
         <p:nvSpPr>
@@ -1669,10 +1621,6 @@
           <a:bodyPr/>
           <a:lstStyle/>
           <a:p>
-            <a:r>
-              <a:rPr lang="en-US" dirty="0"/>
-              <a:t>Team profile for Akatsuki. Emphasize the distinction between result and learning. Ask the team for one preserved decision and one corrective decision.</a:t>
-            </a:r>
             <a:endParaRPr lang="en-US" dirty="0"/>
           </a:p>
         </p:txBody>
@@ -1692,10 +1640,6 @@
           <a:bodyPr/>
           <a:lstStyle/>
           <a:p>
-            <a:fld id="{F7021451-1387-4CA6-816F-3879F97B5CBC}" type="slidenum">
-              <a:rPr lang="en-US"/>
-              <a:t>21</a:t>
-            </a:fld>
             <a:endParaRPr lang="en-US"/>
           </a:p>
         </p:txBody>
@@ -1741,6 +1685,10 @@
           </p:nvPr>
         </p:nvSpPr>
         <p:spPr/>
+        <p:txBody>
+          <a:bodyPr/>
+          <a:p/>
+        </p:txBody>
       </p:sp>
       <p:sp>
         <p:nvSpPr>
@@ -1757,10 +1705,6 @@
           <a:bodyPr/>
           <a:lstStyle/>
           <a:p>
-            <a:r>
-              <a:rPr lang="en-US" dirty="0"/>
-              <a:t>Team profile for Pink. Emphasize the distinction between result and learning. Ask the team for one preserved decision and one corrective decision.</a:t>
-            </a:r>
             <a:endParaRPr lang="en-US" dirty="0"/>
           </a:p>
         </p:txBody>
@@ -1780,10 +1724,6 @@
           <a:bodyPr/>
           <a:lstStyle/>
           <a:p>
-            <a:fld id="{F7021451-1387-4CA6-816F-3879F97B5CBC}" type="slidenum">
-              <a:rPr lang="en-US"/>
-              <a:t>22</a:t>
-            </a:fld>
             <a:endParaRPr lang="en-US"/>
           </a:p>
         </p:txBody>
@@ -1829,6 +1769,10 @@
           </p:nvPr>
         </p:nvSpPr>
         <p:spPr/>
+        <p:txBody>
+          <a:bodyPr/>
+          <a:p/>
+        </p:txBody>
       </p:sp>
       <p:sp>
         <p:nvSpPr>
@@ -1845,10 +1789,6 @@
           <a:bodyPr/>
           <a:lstStyle/>
           <a:p>
-            <a:r>
-              <a:rPr lang="en-US" dirty="0"/>
-              <a:t>Use this synthesis to ask teams to describe what the market rewarded in their own result.</a:t>
-            </a:r>
             <a:endParaRPr lang="en-US" dirty="0"/>
           </a:p>
         </p:txBody>
@@ -1868,10 +1808,6 @@
           <a:bodyPr/>
           <a:lstStyle/>
           <a:p>
-            <a:fld id="{F7021451-1387-4CA6-816F-3879F97B5CBC}" type="slidenum">
-              <a:rPr lang="en-US"/>
-              <a:t>23</a:t>
-            </a:fld>
             <a:endParaRPr lang="en-US"/>
           </a:p>
         </p:txBody>
@@ -1917,6 +1853,10 @@
           </p:nvPr>
         </p:nvSpPr>
         <p:spPr/>
+        <p:txBody>
+          <a:bodyPr/>
+          <a:p/>
+        </p:txBody>
       </p:sp>
       <p:sp>
         <p:nvSpPr>
@@ -1933,10 +1873,6 @@
           <a:bodyPr/>
           <a:lstStyle/>
           <a:p>
-            <a:r>
-              <a:rPr lang="en-US" dirty="0"/>
-              <a:t>Do not humiliate underperforming teams. Frame punished outcomes as evidence for disciplined managerial correction.</a:t>
-            </a:r>
             <a:endParaRPr lang="en-US" dirty="0"/>
           </a:p>
         </p:txBody>
@@ -1956,10 +1892,6 @@
           <a:bodyPr/>
           <a:lstStyle/>
           <a:p>
-            <a:fld id="{F7021451-1387-4CA6-816F-3879F97B5CBC}" type="slidenum">
-              <a:rPr lang="en-US"/>
-              <a:t>24</a:t>
-            </a:fld>
             <a:endParaRPr lang="en-US"/>
           </a:p>
         </p:txBody>
@@ -2005,6 +1937,10 @@
           </p:nvPr>
         </p:nvSpPr>
         <p:spPr/>
+        <p:txBody>
+          <a:bodyPr/>
+          <a:p/>
+        </p:txBody>
       </p:sp>
       <p:sp>
         <p:nvSpPr>
@@ -2021,10 +1957,6 @@
           <a:bodyPr/>
           <a:lstStyle/>
           <a:p>
-            <a:r>
-              <a:rPr lang="en-US" dirty="0"/>
-              <a:t>End the debrief with commitments. Each team should write one rule before touching the next decision sheet.</a:t>
-            </a:r>
             <a:endParaRPr lang="en-US" dirty="0"/>
           </a:p>
         </p:txBody>
@@ -2044,10 +1976,6 @@
           <a:bodyPr/>
           <a:lstStyle/>
           <a:p>
-            <a:fld id="{F7021451-1387-4CA6-816F-3879F97B5CBC}" type="slidenum">
-              <a:rPr lang="en-US"/>
-              <a:t>25</a:t>
-            </a:fld>
             <a:endParaRPr lang="en-US"/>
           </a:p>
         </p:txBody>
@@ -2093,6 +2021,10 @@
           </p:nvPr>
         </p:nvSpPr>
         <p:spPr/>
+        <p:txBody>
+          <a:bodyPr/>
+          <a:p/>
+        </p:txBody>
       </p:sp>
       <p:sp>
         <p:nvSpPr>
@@ -2109,10 +2041,6 @@
           <a:bodyPr/>
           <a:lstStyle/>
           <a:p>
-            <a:r>
-              <a:rPr lang="en-US" dirty="0"/>
-              <a:t>Close by requiring each team to express learning as a decision rule. The point is responsible general management, not storytelling after the fact.</a:t>
-            </a:r>
             <a:endParaRPr lang="en-US" dirty="0"/>
           </a:p>
         </p:txBody>
@@ -2132,10 +2060,6 @@
           <a:bodyPr/>
           <a:lstStyle/>
           <a:p>
-            <a:fld id="{F7021451-1387-4CA6-816F-3879F97B5CBC}" type="slidenum">
-              <a:rPr lang="en-US"/>
-              <a:t>26</a:t>
-            </a:fld>
             <a:endParaRPr lang="en-US"/>
           </a:p>
         </p:txBody>
@@ -2181,6 +2105,10 @@
           </p:nvPr>
         </p:nvSpPr>
         <p:spPr/>
+        <p:txBody>
+          <a:bodyPr/>
+          <a:p/>
+        </p:txBody>
       </p:sp>
       <p:sp>
         <p:nvSpPr>
@@ -2197,10 +2125,6 @@
           <a:bodyPr/>
           <a:lstStyle/>
           <a:p>
-            <a:r>
-              <a:rPr lang="en-US" dirty="0"/>
-              <a:t>This is the aggregate dashboard. Use it to show that the universe-level numbers are only the beginning. The rest of the deck identifies which teams drove the movement.</a:t>
-            </a:r>
             <a:endParaRPr lang="en-US" dirty="0"/>
           </a:p>
         </p:txBody>
@@ -2220,10 +2144,6 @@
           <a:bodyPr/>
           <a:lstStyle/>
           <a:p>
-            <a:fld id="{F7021451-1387-4CA6-816F-3879F97B5CBC}" type="slidenum">
-              <a:rPr lang="en-US"/>
-              <a:t>3</a:t>
-            </a:fld>
             <a:endParaRPr lang="en-US"/>
           </a:p>
         </p:txBody>
@@ -2269,6 +2189,10 @@
           </p:nvPr>
         </p:nvSpPr>
         <p:spPr/>
+        <p:txBody>
+          <a:bodyPr/>
+          <a:p/>
+        </p:txBody>
       </p:sp>
       <p:sp>
         <p:nvSpPr>
@@ -2285,10 +2209,6 @@
           <a:bodyPr/>
           <a:lstStyle/>
           <a:p>
-            <a:r>
-              <a:rPr lang="en-US" dirty="0"/>
-              <a:t>Reveal the rank order but immediately move students away from celebration. Ask them to identify which non-TSR metric makes the leader credible or fragile.</a:t>
-            </a:r>
             <a:endParaRPr lang="en-US" dirty="0"/>
           </a:p>
         </p:txBody>
@@ -2308,10 +2228,6 @@
           <a:bodyPr/>
           <a:lstStyle/>
           <a:p>
-            <a:fld id="{F7021451-1387-4CA6-816F-3879F97B5CBC}" type="slidenum">
-              <a:rPr lang="en-US"/>
-              <a:t>4</a:t>
-            </a:fld>
             <a:endParaRPr lang="en-US"/>
           </a:p>
         </p:txBody>
@@ -2357,6 +2273,10 @@
           </p:nvPr>
         </p:nvSpPr>
         <p:spPr/>
+        <p:txBody>
+          <a:bodyPr/>
+          <a:p/>
+        </p:txBody>
       </p:sp>
       <p:sp>
         <p:nvSpPr>
@@ -2373,10 +2293,6 @@
           <a:bodyPr/>
           <a:lstStyle/>
           <a:p>
-            <a:r>
-              <a:rPr lang="en-US" dirty="0"/>
-              <a:t>This visual is designed for Socratic questioning. Ask each team whether the rank movement reflects an improved strategy system or merely a transient scoring effect.</a:t>
-            </a:r>
             <a:endParaRPr lang="en-US" dirty="0"/>
           </a:p>
         </p:txBody>
@@ -2396,10 +2312,6 @@
           <a:bodyPr/>
           <a:lstStyle/>
           <a:p>
-            <a:fld id="{F7021451-1387-4CA6-816F-3879F97B5CBC}" type="slidenum">
-              <a:rPr lang="en-US"/>
-              <a:t>5</a:t>
-            </a:fld>
             <a:endParaRPr lang="en-US"/>
           </a:p>
         </p:txBody>
@@ -2445,6 +2357,10 @@
           </p:nvPr>
         </p:nvSpPr>
         <p:spPr/>
+        <p:txBody>
+          <a:bodyPr/>
+          <a:p/>
+        </p:txBody>
       </p:sp>
       <p:sp>
         <p:nvSpPr>
@@ -2461,10 +2377,6 @@
           <a:bodyPr/>
           <a:lstStyle/>
           <a:p>
-            <a:r>
-              <a:rPr lang="en-US" dirty="0"/>
-              <a:t>The aim here is to block single-metric thinking. Have students nominate a winner under profit, share, valuation and capital productivity, then ask which is strategically coherent.</a:t>
-            </a:r>
             <a:endParaRPr lang="en-US" dirty="0"/>
           </a:p>
         </p:txBody>
@@ -2484,10 +2396,6 @@
           <a:bodyPr/>
           <a:lstStyle/>
           <a:p>
-            <a:fld id="{F7021451-1387-4CA6-816F-3879F97B5CBC}" type="slidenum">
-              <a:rPr lang="en-US"/>
-              <a:t>6</a:t>
-            </a:fld>
             <a:endParaRPr lang="en-US"/>
           </a:p>
         </p:txBody>
@@ -2533,6 +2441,10 @@
           </p:nvPr>
         </p:nvSpPr>
         <p:spPr/>
+        <p:txBody>
+          <a:bodyPr/>
+          <a:p/>
+        </p:txBody>
       </p:sp>
       <p:sp>
         <p:nvSpPr>
@@ -2549,10 +2461,6 @@
           <a:bodyPr/>
           <a:lstStyle/>
           <a:p>
-            <a:r>
-              <a:rPr lang="en-US" dirty="0"/>
-              <a:t>Ask each team to say whether its revenue movement came primarily from price, volume, product mix, technology mix or regional mix.</a:t>
-            </a:r>
             <a:endParaRPr lang="en-US" dirty="0"/>
           </a:p>
         </p:txBody>
@@ -2572,10 +2480,6 @@
           <a:bodyPr/>
           <a:lstStyle/>
           <a:p>
-            <a:fld id="{F7021451-1387-4CA6-816F-3879F97B5CBC}" type="slidenum">
-              <a:rPr lang="en-US"/>
-              <a:t>7</a:t>
-            </a:fld>
             <a:endParaRPr lang="en-US"/>
           </a:p>
         </p:txBody>
@@ -2621,6 +2525,10 @@
           </p:nvPr>
         </p:nvSpPr>
         <p:spPr/>
+        <p:txBody>
+          <a:bodyPr/>
+          <a:p/>
+        </p:txBody>
       </p:sp>
       <p:sp>
         <p:nvSpPr>
@@ -2637,10 +2545,6 @@
           <a:bodyPr/>
           <a:lstStyle/>
           <a:p>
-            <a:r>
-              <a:rPr lang="en-US" dirty="0"/>
-              <a:t>This slide should lead into cost structure. Ask teams to avoid “we grew” explanations and specify which cost or margin moved.</a:t>
-            </a:r>
             <a:endParaRPr lang="en-US" dirty="0"/>
           </a:p>
         </p:txBody>
@@ -2660,10 +2564,6 @@
           <a:bodyPr/>
           <a:lstStyle/>
           <a:p>
-            <a:fld id="{F7021451-1387-4CA6-816F-3879F97B5CBC}" type="slidenum">
-              <a:rPr lang="en-US"/>
-              <a:t>8</a:t>
-            </a:fld>
             <a:endParaRPr lang="en-US"/>
           </a:p>
         </p:txBody>
@@ -2709,6 +2609,10 @@
           </p:nvPr>
         </p:nvSpPr>
         <p:spPr/>
+        <p:txBody>
+          <a:bodyPr/>
+          <a:p/>
+        </p:txBody>
       </p:sp>
       <p:sp>
         <p:nvSpPr>
@@ -2725,10 +2629,6 @@
           <a:bodyPr/>
           <a:lstStyle/>
           <a:p>
-            <a:r>
-              <a:rPr lang="en-US" dirty="0"/>
-              <a:t>Use this slide to ask whether share gain came from a real value proposition or price/availability without economics.</a:t>
-            </a:r>
             <a:endParaRPr lang="en-US" dirty="0"/>
           </a:p>
         </p:txBody>
@@ -2748,10 +2648,6 @@
           <a:bodyPr/>
           <a:lstStyle/>
           <a:p>
-            <a:fld id="{F7021451-1387-4CA6-816F-3879F97B5CBC}" type="slidenum">
-              <a:rPr lang="en-US"/>
-              <a:t>9</a:t>
-            </a:fld>
             <a:endParaRPr lang="en-US"/>
           </a:p>
         </p:txBody>
@@ -3238,6 +3134,10 @@
             <a:prstDash val="solid"/>
           </a:ln>
         </p:spPr>
+        <p:txBody>
+          <a:bodyPr/>
+          <a:p/>
+        </p:txBody>
       </p:sp>
       <p:sp>
         <p:nvSpPr>
@@ -3556,6 +3456,10 @@
             <a:prstDash val="solid"/>
           </a:ln>
         </p:spPr>
+        <p:txBody>
+          <a:bodyPr/>
+          <a:p/>
+        </p:txBody>
       </p:sp>
       <p:sp>
         <p:nvSpPr>
@@ -3659,6 +3563,10 @@
             <a:prstDash val="solid"/>
           </a:ln>
         </p:spPr>
+        <p:txBody>
+          <a:bodyPr/>
+          <a:p/>
+        </p:txBody>
       </p:sp>
       <p:sp>
         <p:nvSpPr>
@@ -3725,6 +3633,10 @@
             <a:prstDash val="solid"/>
           </a:ln>
         </p:spPr>
+        <p:txBody>
+          <a:bodyPr/>
+          <a:p/>
+        </p:txBody>
       </p:sp>
       <p:sp>
         <p:nvSpPr>
@@ -3791,6 +3703,10 @@
             <a:prstDash val="solid"/>
           </a:ln>
         </p:spPr>
+        <p:txBody>
+          <a:bodyPr/>
+          <a:p/>
+        </p:txBody>
       </p:sp>
       <p:sp>
         <p:nvSpPr>
@@ -3857,6 +3773,10 @@
             <a:prstDash val="solid"/>
           </a:ln>
         </p:spPr>
+        <p:txBody>
+          <a:bodyPr/>
+          <a:p/>
+        </p:txBody>
       </p:sp>
       <p:sp>
         <p:nvSpPr>
@@ -3923,6 +3843,10 @@
             <a:prstDash val="solid"/>
           </a:ln>
         </p:spPr>
+        <p:txBody>
+          <a:bodyPr/>
+          <a:p/>
+        </p:txBody>
       </p:sp>
       <p:sp>
         <p:nvSpPr>
@@ -3989,6 +3913,10 @@
             <a:prstDash val="solid"/>
           </a:ln>
         </p:spPr>
+        <p:txBody>
+          <a:bodyPr/>
+          <a:p/>
+        </p:txBody>
       </p:sp>
       <p:sp>
         <p:nvSpPr>
@@ -4055,6 +3983,10 @@
             <a:prstDash val="solid"/>
           </a:ln>
         </p:spPr>
+        <p:txBody>
+          <a:bodyPr/>
+          <a:p/>
+        </p:txBody>
       </p:sp>
       <p:sp>
         <p:nvSpPr>
@@ -4121,6 +4053,10 @@
             <a:prstDash val="solid"/>
           </a:ln>
         </p:spPr>
+        <p:txBody>
+          <a:bodyPr/>
+          <a:p/>
+        </p:txBody>
       </p:sp>
       <p:sp>
         <p:nvSpPr>
@@ -4187,6 +4123,10 @@
             <a:prstDash val="solid"/>
           </a:ln>
         </p:spPr>
+        <p:txBody>
+          <a:bodyPr/>
+          <a:p/>
+        </p:txBody>
       </p:sp>
       <p:sp>
         <p:nvSpPr>
@@ -4253,6 +4193,10 @@
             <a:prstDash val="solid"/>
           </a:ln>
         </p:spPr>
+        <p:txBody>
+          <a:bodyPr/>
+          <a:p/>
+        </p:txBody>
       </p:sp>
       <p:sp>
         <p:nvSpPr>
@@ -4319,6 +4263,10 @@
             <a:prstDash val="solid"/>
           </a:ln>
         </p:spPr>
+        <p:txBody>
+          <a:bodyPr/>
+          <a:p/>
+        </p:txBody>
       </p:sp>
       <p:sp>
         <p:nvSpPr>
@@ -4385,6 +4333,10 @@
             <a:prstDash val="solid"/>
           </a:ln>
         </p:spPr>
+        <p:txBody>
+          <a:bodyPr/>
+          <a:p/>
+        </p:txBody>
       </p:sp>
       <p:sp>
         <p:nvSpPr>
@@ -4451,6 +4403,10 @@
             <a:prstDash val="solid"/>
           </a:ln>
         </p:spPr>
+        <p:txBody>
+          <a:bodyPr/>
+          <a:p/>
+        </p:txBody>
       </p:sp>
       <p:sp>
         <p:nvSpPr>
@@ -4517,6 +4473,10 @@
             <a:prstDash val="solid"/>
           </a:ln>
         </p:spPr>
+        <p:txBody>
+          <a:bodyPr/>
+          <a:p/>
+        </p:txBody>
       </p:sp>
       <p:sp>
         <p:nvSpPr>
@@ -4583,6 +4543,10 @@
             <a:prstDash val="solid"/>
           </a:ln>
         </p:spPr>
+        <p:txBody>
+          <a:bodyPr/>
+          <a:p/>
+        </p:txBody>
       </p:sp>
       <p:sp>
         <p:nvSpPr>
@@ -4649,6 +4613,10 @@
             <a:prstDash val="solid"/>
           </a:ln>
         </p:spPr>
+        <p:txBody>
+          <a:bodyPr/>
+          <a:p/>
+        </p:txBody>
       </p:sp>
       <p:sp>
         <p:nvSpPr>
@@ -4715,6 +4683,10 @@
             <a:prstDash val="solid"/>
           </a:ln>
         </p:spPr>
+        <p:txBody>
+          <a:bodyPr/>
+          <a:p/>
+        </p:txBody>
       </p:sp>
       <p:sp>
         <p:nvSpPr>
@@ -4781,6 +4753,10 @@
             <a:prstDash val="solid"/>
           </a:ln>
         </p:spPr>
+        <p:txBody>
+          <a:bodyPr/>
+          <a:p/>
+        </p:txBody>
       </p:sp>
       <p:sp>
         <p:nvSpPr>
@@ -4847,6 +4823,10 @@
             <a:prstDash val="solid"/>
           </a:ln>
         </p:spPr>
+        <p:txBody>
+          <a:bodyPr/>
+          <a:p/>
+        </p:txBody>
       </p:sp>
       <p:sp>
         <p:nvSpPr>
@@ -4913,6 +4893,10 @@
             <a:prstDash val="solid"/>
           </a:ln>
         </p:spPr>
+        <p:txBody>
+          <a:bodyPr/>
+          <a:p/>
+        </p:txBody>
       </p:sp>
       <p:sp>
         <p:nvSpPr>
@@ -4979,6 +4963,10 @@
             <a:prstDash val="solid"/>
           </a:ln>
         </p:spPr>
+        <p:txBody>
+          <a:bodyPr/>
+          <a:p/>
+        </p:txBody>
       </p:sp>
       <p:sp>
         <p:nvSpPr>
@@ -5045,6 +5033,10 @@
             <a:prstDash val="solid"/>
           </a:ln>
         </p:spPr>
+        <p:txBody>
+          <a:bodyPr/>
+          <a:p/>
+        </p:txBody>
       </p:sp>
       <p:sp>
         <p:nvSpPr>
@@ -5111,6 +5103,10 @@
             <a:prstDash val="solid"/>
           </a:ln>
         </p:spPr>
+        <p:txBody>
+          <a:bodyPr/>
+          <a:p/>
+        </p:txBody>
       </p:sp>
       <p:sp>
         <p:nvSpPr>
@@ -5177,6 +5173,10 @@
             <a:prstDash val="solid"/>
           </a:ln>
         </p:spPr>
+        <p:txBody>
+          <a:bodyPr/>
+          <a:p/>
+        </p:txBody>
       </p:sp>
       <p:sp>
         <p:nvSpPr>
@@ -5243,6 +5243,10 @@
             <a:prstDash val="solid"/>
           </a:ln>
         </p:spPr>
+        <p:txBody>
+          <a:bodyPr/>
+          <a:p/>
+        </p:txBody>
       </p:sp>
       <p:sp>
         <p:nvSpPr>
@@ -5309,6 +5313,10 @@
             <a:prstDash val="solid"/>
           </a:ln>
         </p:spPr>
+        <p:txBody>
+          <a:bodyPr/>
+          <a:p/>
+        </p:txBody>
       </p:sp>
       <p:sp>
         <p:nvSpPr>
@@ -5375,6 +5383,10 @@
             <a:prstDash val="solid"/>
           </a:ln>
         </p:spPr>
+        <p:txBody>
+          <a:bodyPr/>
+          <a:p/>
+        </p:txBody>
       </p:sp>
       <p:sp>
         <p:nvSpPr>
@@ -5441,6 +5453,10 @@
             <a:prstDash val="solid"/>
           </a:ln>
         </p:spPr>
+        <p:txBody>
+          <a:bodyPr/>
+          <a:p/>
+        </p:txBody>
       </p:sp>
       <p:sp>
         <p:nvSpPr>
@@ -5507,6 +5523,10 @@
             <a:prstDash val="solid"/>
           </a:ln>
         </p:spPr>
+        <p:txBody>
+          <a:bodyPr/>
+          <a:p/>
+        </p:txBody>
       </p:sp>
       <p:sp>
         <p:nvSpPr>
@@ -5573,6 +5593,10 @@
             <a:prstDash val="solid"/>
           </a:ln>
         </p:spPr>
+        <p:txBody>
+          <a:bodyPr/>
+          <a:p/>
+        </p:txBody>
       </p:sp>
       <p:sp>
         <p:nvSpPr>
@@ -5639,6 +5663,10 @@
             <a:prstDash val="solid"/>
           </a:ln>
         </p:spPr>
+        <p:txBody>
+          <a:bodyPr/>
+          <a:p/>
+        </p:txBody>
       </p:sp>
       <p:sp>
         <p:nvSpPr>
@@ -5705,6 +5733,10 @@
             <a:prstDash val="solid"/>
           </a:ln>
         </p:spPr>
+        <p:txBody>
+          <a:bodyPr/>
+          <a:p/>
+        </p:txBody>
       </p:sp>
       <p:sp>
         <p:nvSpPr>
@@ -5941,6 +5973,10 @@
             <a:prstDash val="solid"/>
           </a:ln>
         </p:spPr>
+        <p:txBody>
+          <a:bodyPr/>
+          <a:p/>
+        </p:txBody>
       </p:sp>
       <p:sp>
         <p:nvSpPr>
@@ -6193,6 +6229,10 @@
             <a:prstDash val="solid"/>
           </a:ln>
         </p:spPr>
+        <p:txBody>
+          <a:bodyPr/>
+          <a:p/>
+        </p:txBody>
       </p:sp>
       <p:sp>
         <p:nvSpPr>
@@ -6337,6 +6377,10 @@
             <a:prstDash val="solid"/>
           </a:ln>
         </p:spPr>
+        <p:txBody>
+          <a:bodyPr/>
+          <a:p/>
+        </p:txBody>
       </p:sp>
       <p:sp>
         <p:nvSpPr>
@@ -6442,6 +6486,10 @@
             <a:prstDash val="solid"/>
           </a:ln>
         </p:spPr>
+        <p:txBody>
+          <a:bodyPr/>
+          <a:p/>
+        </p:txBody>
       </p:sp>
       <p:sp>
         <p:nvSpPr>
@@ -6547,6 +6595,10 @@
             <a:prstDash val="solid"/>
           </a:ln>
         </p:spPr>
+        <p:txBody>
+          <a:bodyPr/>
+          <a:p/>
+        </p:txBody>
       </p:sp>
       <p:sp>
         <p:nvSpPr>
@@ -6652,6 +6704,10 @@
             <a:prstDash val="solid"/>
           </a:ln>
         </p:spPr>
+        <p:txBody>
+          <a:bodyPr/>
+          <a:p/>
+        </p:txBody>
       </p:sp>
       <p:sp>
         <p:nvSpPr>
@@ -6757,6 +6813,10 @@
             <a:prstDash val="solid"/>
           </a:ln>
         </p:spPr>
+        <p:txBody>
+          <a:bodyPr/>
+          <a:p/>
+        </p:txBody>
       </p:sp>
       <p:sp>
         <p:nvSpPr>
@@ -6862,6 +6922,10 @@
             <a:prstDash val="solid"/>
           </a:ln>
         </p:spPr>
+        <p:txBody>
+          <a:bodyPr/>
+          <a:p/>
+        </p:txBody>
       </p:sp>
       <p:sp>
         <p:nvSpPr>
@@ -6967,6 +7031,10 @@
             <a:prstDash val="solid"/>
           </a:ln>
         </p:spPr>
+        <p:txBody>
+          <a:bodyPr/>
+          <a:p/>
+        </p:txBody>
       </p:sp>
       <p:sp>
         <p:nvSpPr>
@@ -7031,6 +7099,10 @@
             <a:prstDash val="solid"/>
           </a:ln>
         </p:spPr>
+        <p:txBody>
+          <a:bodyPr/>
+          <a:p/>
+        </p:txBody>
       </p:sp>
       <p:sp>
         <p:nvSpPr>
@@ -7128,6 +7200,10 @@
             <a:prstDash val="solid"/>
           </a:ln>
         </p:spPr>
+        <p:txBody>
+          <a:bodyPr/>
+          <a:p/>
+        </p:txBody>
       </p:sp>
       <p:sp>
         <p:nvSpPr>
@@ -7191,6 +7267,10 @@
             <a:prstDash val="solid"/>
           </a:ln>
         </p:spPr>
+        <p:txBody>
+          <a:bodyPr/>
+          <a:p/>
+        </p:txBody>
       </p:sp>
       <p:sp>
         <p:nvSpPr>
@@ -7254,6 +7334,10 @@
             <a:prstDash val="solid"/>
           </a:ln>
         </p:spPr>
+        <p:txBody>
+          <a:bodyPr/>
+          <a:p/>
+        </p:txBody>
       </p:sp>
       <p:sp>
         <p:nvSpPr>
@@ -7317,6 +7401,10 @@
             <a:prstDash val="solid"/>
           </a:ln>
         </p:spPr>
+        <p:txBody>
+          <a:bodyPr/>
+          <a:p/>
+        </p:txBody>
       </p:sp>
       <p:sp>
         <p:nvSpPr>
@@ -7380,6 +7468,10 @@
             <a:prstDash val="solid"/>
           </a:ln>
         </p:spPr>
+        <p:txBody>
+          <a:bodyPr/>
+          <a:p/>
+        </p:txBody>
       </p:sp>
       <p:sp>
         <p:nvSpPr>
@@ -7443,6 +7535,10 @@
             <a:prstDash val="solid"/>
           </a:ln>
         </p:spPr>
+        <p:txBody>
+          <a:bodyPr/>
+          <a:p/>
+        </p:txBody>
       </p:sp>
       <p:sp>
         <p:nvSpPr>
@@ -7506,6 +7602,10 @@
             <a:prstDash val="solid"/>
           </a:ln>
         </p:spPr>
+        <p:txBody>
+          <a:bodyPr/>
+          <a:p/>
+        </p:txBody>
       </p:sp>
       <p:sp>
         <p:nvSpPr>
@@ -7724,6 +7824,10 @@
             <a:prstDash val="solid"/>
           </a:ln>
         </p:spPr>
+        <p:txBody>
+          <a:bodyPr/>
+          <a:p/>
+        </p:txBody>
       </p:sp>
       <p:sp>
         <p:nvSpPr>
@@ -7976,6 +8080,10 @@
             <a:prstDash val="solid"/>
           </a:ln>
         </p:spPr>
+        <p:txBody>
+          <a:bodyPr/>
+          <a:p/>
+        </p:txBody>
       </p:sp>
       <p:sp>
         <p:nvSpPr>
@@ -8079,6 +8187,10 @@
             <a:prstDash val="solid"/>
           </a:ln>
         </p:spPr>
+        <p:txBody>
+          <a:bodyPr/>
+          <a:p/>
+        </p:txBody>
       </p:sp>
       <p:sp>
         <p:nvSpPr>
@@ -8145,6 +8257,10 @@
             <a:prstDash val="solid"/>
           </a:ln>
         </p:spPr>
+        <p:txBody>
+          <a:bodyPr/>
+          <a:p/>
+        </p:txBody>
       </p:sp>
       <p:sp>
         <p:nvSpPr>
@@ -8211,6 +8327,10 @@
             <a:prstDash val="solid"/>
           </a:ln>
         </p:spPr>
+        <p:txBody>
+          <a:bodyPr/>
+          <a:p/>
+        </p:txBody>
       </p:sp>
       <p:sp>
         <p:nvSpPr>
@@ -8277,6 +8397,10 @@
             <a:prstDash val="solid"/>
           </a:ln>
         </p:spPr>
+        <p:txBody>
+          <a:bodyPr/>
+          <a:p/>
+        </p:txBody>
       </p:sp>
       <p:sp>
         <p:nvSpPr>
@@ -8343,6 +8467,10 @@
             <a:prstDash val="solid"/>
           </a:ln>
         </p:spPr>
+        <p:txBody>
+          <a:bodyPr/>
+          <a:p/>
+        </p:txBody>
       </p:sp>
       <p:sp>
         <p:nvSpPr>
@@ -8409,6 +8537,10 @@
             <a:prstDash val="solid"/>
           </a:ln>
         </p:spPr>
+        <p:txBody>
+          <a:bodyPr/>
+          <a:p/>
+        </p:txBody>
       </p:sp>
       <p:sp>
         <p:nvSpPr>
@@ -8475,6 +8607,10 @@
             <a:prstDash val="solid"/>
           </a:ln>
         </p:spPr>
+        <p:txBody>
+          <a:bodyPr/>
+          <a:p/>
+        </p:txBody>
       </p:sp>
       <p:sp>
         <p:nvSpPr>
@@ -8541,6 +8677,10 @@
             <a:prstDash val="solid"/>
           </a:ln>
         </p:spPr>
+        <p:txBody>
+          <a:bodyPr/>
+          <a:p/>
+        </p:txBody>
       </p:sp>
       <p:sp>
         <p:nvSpPr>
@@ -8607,6 +8747,10 @@
             <a:prstDash val="solid"/>
           </a:ln>
         </p:spPr>
+        <p:txBody>
+          <a:bodyPr/>
+          <a:p/>
+        </p:txBody>
       </p:sp>
       <p:sp>
         <p:nvSpPr>
@@ -8673,6 +8817,10 @@
             <a:prstDash val="solid"/>
           </a:ln>
         </p:spPr>
+        <p:txBody>
+          <a:bodyPr/>
+          <a:p/>
+        </p:txBody>
       </p:sp>
       <p:sp>
         <p:nvSpPr>
@@ -8739,6 +8887,10 @@
             <a:prstDash val="solid"/>
           </a:ln>
         </p:spPr>
+        <p:txBody>
+          <a:bodyPr/>
+          <a:p/>
+        </p:txBody>
       </p:sp>
       <p:sp>
         <p:nvSpPr>
@@ -8805,6 +8957,10 @@
             <a:prstDash val="solid"/>
           </a:ln>
         </p:spPr>
+        <p:txBody>
+          <a:bodyPr/>
+          <a:p/>
+        </p:txBody>
       </p:sp>
       <p:sp>
         <p:nvSpPr>
@@ -8871,6 +9027,10 @@
             <a:prstDash val="solid"/>
           </a:ln>
         </p:spPr>
+        <p:txBody>
+          <a:bodyPr/>
+          <a:p/>
+        </p:txBody>
       </p:sp>
       <p:sp>
         <p:nvSpPr>
@@ -8937,6 +9097,10 @@
             <a:prstDash val="solid"/>
           </a:ln>
         </p:spPr>
+        <p:txBody>
+          <a:bodyPr/>
+          <a:p/>
+        </p:txBody>
       </p:sp>
       <p:sp>
         <p:nvSpPr>
@@ -9003,6 +9167,10 @@
             <a:prstDash val="solid"/>
           </a:ln>
         </p:spPr>
+        <p:txBody>
+          <a:bodyPr/>
+          <a:p/>
+        </p:txBody>
       </p:sp>
       <p:sp>
         <p:nvSpPr>
@@ -9069,6 +9237,10 @@
             <a:prstDash val="solid"/>
           </a:ln>
         </p:spPr>
+        <p:txBody>
+          <a:bodyPr/>
+          <a:p/>
+        </p:txBody>
       </p:sp>
       <p:sp>
         <p:nvSpPr>
@@ -9135,6 +9307,10 @@
             <a:prstDash val="solid"/>
           </a:ln>
         </p:spPr>
+        <p:txBody>
+          <a:bodyPr/>
+          <a:p/>
+        </p:txBody>
       </p:sp>
       <p:sp>
         <p:nvSpPr>
@@ -9201,6 +9377,10 @@
             <a:prstDash val="solid"/>
           </a:ln>
         </p:spPr>
+        <p:txBody>
+          <a:bodyPr/>
+          <a:p/>
+        </p:txBody>
       </p:sp>
       <p:sp>
         <p:nvSpPr>
@@ -9267,6 +9447,10 @@
             <a:prstDash val="solid"/>
           </a:ln>
         </p:spPr>
+        <p:txBody>
+          <a:bodyPr/>
+          <a:p/>
+        </p:txBody>
       </p:sp>
       <p:sp>
         <p:nvSpPr>
@@ -9333,6 +9517,10 @@
             <a:prstDash val="solid"/>
           </a:ln>
         </p:spPr>
+        <p:txBody>
+          <a:bodyPr/>
+          <a:p/>
+        </p:txBody>
       </p:sp>
       <p:sp>
         <p:nvSpPr>
@@ -9399,6 +9587,10 @@
             <a:prstDash val="solid"/>
           </a:ln>
         </p:spPr>
+        <p:txBody>
+          <a:bodyPr/>
+          <a:p/>
+        </p:txBody>
       </p:sp>
       <p:sp>
         <p:nvSpPr>
@@ -9465,6 +9657,10 @@
             <a:prstDash val="solid"/>
           </a:ln>
         </p:spPr>
+        <p:txBody>
+          <a:bodyPr/>
+          <a:p/>
+        </p:txBody>
       </p:sp>
       <p:sp>
         <p:nvSpPr>
@@ -9531,6 +9727,10 @@
             <a:prstDash val="solid"/>
           </a:ln>
         </p:spPr>
+        <p:txBody>
+          <a:bodyPr/>
+          <a:p/>
+        </p:txBody>
       </p:sp>
       <p:sp>
         <p:nvSpPr>
@@ -9597,6 +9797,10 @@
             <a:prstDash val="solid"/>
           </a:ln>
         </p:spPr>
+        <p:txBody>
+          <a:bodyPr/>
+          <a:p/>
+        </p:txBody>
       </p:sp>
       <p:sp>
         <p:nvSpPr>
@@ -9663,6 +9867,10 @@
             <a:prstDash val="solid"/>
           </a:ln>
         </p:spPr>
+        <p:txBody>
+          <a:bodyPr/>
+          <a:p/>
+        </p:txBody>
       </p:sp>
       <p:sp>
         <p:nvSpPr>
@@ -9729,6 +9937,10 @@
             <a:prstDash val="solid"/>
           </a:ln>
         </p:spPr>
+        <p:txBody>
+          <a:bodyPr/>
+          <a:p/>
+        </p:txBody>
       </p:sp>
       <p:sp>
         <p:nvSpPr>
@@ -9795,6 +10007,10 @@
             <a:prstDash val="solid"/>
           </a:ln>
         </p:spPr>
+        <p:txBody>
+          <a:bodyPr/>
+          <a:p/>
+        </p:txBody>
       </p:sp>
       <p:sp>
         <p:nvSpPr>
@@ -9861,6 +10077,10 @@
             <a:prstDash val="solid"/>
           </a:ln>
         </p:spPr>
+        <p:txBody>
+          <a:bodyPr/>
+          <a:p/>
+        </p:txBody>
       </p:sp>
       <p:sp>
         <p:nvSpPr>
@@ -9927,6 +10147,10 @@
             <a:prstDash val="solid"/>
           </a:ln>
         </p:spPr>
+        <p:txBody>
+          <a:bodyPr/>
+          <a:p/>
+        </p:txBody>
       </p:sp>
       <p:sp>
         <p:nvSpPr>
@@ -9993,6 +10217,10 @@
             <a:prstDash val="solid"/>
           </a:ln>
         </p:spPr>
+        <p:txBody>
+          <a:bodyPr/>
+          <a:p/>
+        </p:txBody>
       </p:sp>
       <p:sp>
         <p:nvSpPr>
@@ -10059,6 +10287,10 @@
             <a:prstDash val="solid"/>
           </a:ln>
         </p:spPr>
+        <p:txBody>
+          <a:bodyPr/>
+          <a:p/>
+        </p:txBody>
       </p:sp>
       <p:sp>
         <p:nvSpPr>
@@ -10125,6 +10357,10 @@
             <a:prstDash val="solid"/>
           </a:ln>
         </p:spPr>
+        <p:txBody>
+          <a:bodyPr/>
+          <a:p/>
+        </p:txBody>
       </p:sp>
       <p:sp>
         <p:nvSpPr>
@@ -10191,6 +10427,10 @@
             <a:prstDash val="solid"/>
           </a:ln>
         </p:spPr>
+        <p:txBody>
+          <a:bodyPr/>
+          <a:p/>
+        </p:txBody>
       </p:sp>
       <p:sp>
         <p:nvSpPr>
@@ -10257,6 +10497,10 @@
             <a:prstDash val="solid"/>
           </a:ln>
         </p:spPr>
+        <p:txBody>
+          <a:bodyPr/>
+          <a:p/>
+        </p:txBody>
       </p:sp>
       <p:sp>
         <p:nvSpPr>
@@ -10323,6 +10567,10 @@
             <a:prstDash val="solid"/>
           </a:ln>
         </p:spPr>
+        <p:txBody>
+          <a:bodyPr/>
+          <a:p/>
+        </p:txBody>
       </p:sp>
       <p:sp>
         <p:nvSpPr>
@@ -10389,6 +10637,10 @@
             <a:prstDash val="solid"/>
           </a:ln>
         </p:spPr>
+        <p:txBody>
+          <a:bodyPr/>
+          <a:p/>
+        </p:txBody>
       </p:sp>
       <p:sp>
         <p:nvSpPr>
@@ -10455,6 +10707,10 @@
             <a:prstDash val="solid"/>
           </a:ln>
         </p:spPr>
+        <p:txBody>
+          <a:bodyPr/>
+          <a:p/>
+        </p:txBody>
       </p:sp>
       <p:sp>
         <p:nvSpPr>
@@ -10521,6 +10777,10 @@
             <a:prstDash val="solid"/>
           </a:ln>
         </p:spPr>
+        <p:txBody>
+          <a:bodyPr/>
+          <a:p/>
+        </p:txBody>
       </p:sp>
       <p:sp>
         <p:nvSpPr>
@@ -10587,6 +10847,10 @@
             <a:prstDash val="solid"/>
           </a:ln>
         </p:spPr>
+        <p:txBody>
+          <a:bodyPr/>
+          <a:p/>
+        </p:txBody>
       </p:sp>
       <p:sp>
         <p:nvSpPr>
@@ -10653,6 +10917,10 @@
             <a:prstDash val="solid"/>
           </a:ln>
         </p:spPr>
+        <p:txBody>
+          <a:bodyPr/>
+          <a:p/>
+        </p:txBody>
       </p:sp>
       <p:sp>
         <p:nvSpPr>
@@ -10874,6 +11142,10 @@
             <a:prstDash val="solid"/>
           </a:ln>
         </p:spPr>
+        <p:txBody>
+          <a:bodyPr/>
+          <a:p/>
+        </p:txBody>
       </p:sp>
       <p:sp>
         <p:nvSpPr>
@@ -11126,6 +11398,10 @@
             <a:prstDash val="solid"/>
           </a:ln>
         </p:spPr>
+        <p:txBody>
+          <a:bodyPr/>
+          <a:p/>
+        </p:txBody>
       </p:sp>
       <p:sp>
         <p:nvSpPr>
@@ -11270,6 +11546,10 @@
             <a:prstDash val="solid"/>
           </a:ln>
         </p:spPr>
+        <p:txBody>
+          <a:bodyPr/>
+          <a:p/>
+        </p:txBody>
       </p:sp>
       <p:sp>
         <p:nvSpPr>
@@ -11375,6 +11655,10 @@
             <a:prstDash val="solid"/>
           </a:ln>
         </p:spPr>
+        <p:txBody>
+          <a:bodyPr/>
+          <a:p/>
+        </p:txBody>
       </p:sp>
       <p:sp>
         <p:nvSpPr>
@@ -11480,6 +11764,10 @@
             <a:prstDash val="solid"/>
           </a:ln>
         </p:spPr>
+        <p:txBody>
+          <a:bodyPr/>
+          <a:p/>
+        </p:txBody>
       </p:sp>
       <p:sp>
         <p:nvSpPr>
@@ -11585,6 +11873,10 @@
             <a:prstDash val="solid"/>
           </a:ln>
         </p:spPr>
+        <p:txBody>
+          <a:bodyPr/>
+          <a:p/>
+        </p:txBody>
       </p:sp>
       <p:sp>
         <p:nvSpPr>
@@ -11690,6 +11982,10 @@
             <a:prstDash val="solid"/>
           </a:ln>
         </p:spPr>
+        <p:txBody>
+          <a:bodyPr/>
+          <a:p/>
+        </p:txBody>
       </p:sp>
       <p:sp>
         <p:nvSpPr>
@@ -11795,6 +12091,10 @@
             <a:prstDash val="solid"/>
           </a:ln>
         </p:spPr>
+        <p:txBody>
+          <a:bodyPr/>
+          <a:p/>
+        </p:txBody>
       </p:sp>
       <p:sp>
         <p:nvSpPr>
@@ -11900,6 +12200,10 @@
             <a:prstDash val="solid"/>
           </a:ln>
         </p:spPr>
+        <p:txBody>
+          <a:bodyPr/>
+          <a:p/>
+        </p:txBody>
       </p:sp>
       <p:sp>
         <p:nvSpPr>
@@ -12005,6 +12309,10 @@
             <a:prstDash val="solid"/>
           </a:ln>
         </p:spPr>
+        <p:txBody>
+          <a:bodyPr/>
+          <a:p/>
+        </p:txBody>
       </p:sp>
       <p:sp>
         <p:nvSpPr>
@@ -12110,6 +12418,10 @@
             <a:prstDash val="solid"/>
           </a:ln>
         </p:spPr>
+        <p:txBody>
+          <a:bodyPr/>
+          <a:p/>
+        </p:txBody>
       </p:sp>
       <p:sp>
         <p:nvSpPr>
@@ -12215,6 +12527,10 @@
             <a:prstDash val="solid"/>
           </a:ln>
         </p:spPr>
+        <p:txBody>
+          <a:bodyPr/>
+          <a:p/>
+        </p:txBody>
       </p:sp>
       <p:sp>
         <p:nvSpPr>
@@ -12320,6 +12636,10 @@
             <a:prstDash val="solid"/>
           </a:ln>
         </p:spPr>
+        <p:txBody>
+          <a:bodyPr/>
+          <a:p/>
+        </p:txBody>
       </p:sp>
       <p:sp>
         <p:nvSpPr>
@@ -12425,6 +12745,10 @@
             <a:prstDash val="solid"/>
           </a:ln>
         </p:spPr>
+        <p:txBody>
+          <a:bodyPr/>
+          <a:p/>
+        </p:txBody>
       </p:sp>
       <p:sp>
         <p:nvSpPr>
@@ -12530,6 +12854,10 @@
             <a:prstDash val="solid"/>
           </a:ln>
         </p:spPr>
+        <p:txBody>
+          <a:bodyPr/>
+          <a:p/>
+        </p:txBody>
       </p:sp>
       <p:sp>
         <p:nvSpPr>
@@ -12635,6 +12963,10 @@
             <a:prstDash val="solid"/>
           </a:ln>
         </p:spPr>
+        <p:txBody>
+          <a:bodyPr/>
+          <a:p/>
+        </p:txBody>
       </p:sp>
       <p:sp>
         <p:nvSpPr>
@@ -12697,6 +13029,10 @@
             <a:prstDash val="solid"/>
           </a:ln>
         </p:spPr>
+        <p:txBody>
+          <a:bodyPr/>
+          <a:p/>
+        </p:txBody>
       </p:sp>
       <p:sp>
         <p:nvSpPr>
@@ -12877,6 +13213,10 @@
             <a:prstDash val="solid"/>
           </a:ln>
         </p:spPr>
+        <p:txBody>
+          <a:bodyPr/>
+          <a:p/>
+        </p:txBody>
       </p:sp>
       <p:sp>
         <p:nvSpPr>
@@ -13129,6 +13469,10 @@
             <a:prstDash val="solid"/>
           </a:ln>
         </p:spPr>
+        <p:txBody>
+          <a:bodyPr/>
+          <a:p/>
+        </p:txBody>
       </p:sp>
       <p:sp>
         <p:nvSpPr>
@@ -13232,6 +13576,10 @@
             <a:prstDash val="solid"/>
           </a:ln>
         </p:spPr>
+        <p:txBody>
+          <a:bodyPr/>
+          <a:p/>
+        </p:txBody>
       </p:sp>
       <p:sp>
         <p:nvSpPr>
@@ -13298,6 +13646,10 @@
             <a:prstDash val="solid"/>
           </a:ln>
         </p:spPr>
+        <p:txBody>
+          <a:bodyPr/>
+          <a:p/>
+        </p:txBody>
       </p:sp>
       <p:sp>
         <p:nvSpPr>
@@ -13364,6 +13716,10 @@
             <a:prstDash val="solid"/>
           </a:ln>
         </p:spPr>
+        <p:txBody>
+          <a:bodyPr/>
+          <a:p/>
+        </p:txBody>
       </p:sp>
       <p:sp>
         <p:nvSpPr>
@@ -13430,6 +13786,10 @@
             <a:prstDash val="solid"/>
           </a:ln>
         </p:spPr>
+        <p:txBody>
+          <a:bodyPr/>
+          <a:p/>
+        </p:txBody>
       </p:sp>
       <p:sp>
         <p:nvSpPr>
@@ -13496,6 +13856,10 @@
             <a:prstDash val="solid"/>
           </a:ln>
         </p:spPr>
+        <p:txBody>
+          <a:bodyPr/>
+          <a:p/>
+        </p:txBody>
       </p:sp>
       <p:sp>
         <p:nvSpPr>
@@ -13562,6 +13926,10 @@
             <a:prstDash val="solid"/>
           </a:ln>
         </p:spPr>
+        <p:txBody>
+          <a:bodyPr/>
+          <a:p/>
+        </p:txBody>
       </p:sp>
       <p:sp>
         <p:nvSpPr>
@@ -13628,6 +13996,10 @@
             <a:prstDash val="solid"/>
           </a:ln>
         </p:spPr>
+        <p:txBody>
+          <a:bodyPr/>
+          <a:p/>
+        </p:txBody>
       </p:sp>
       <p:sp>
         <p:nvSpPr>
@@ -13694,6 +14066,10 @@
             <a:prstDash val="solid"/>
           </a:ln>
         </p:spPr>
+        <p:txBody>
+          <a:bodyPr/>
+          <a:p/>
+        </p:txBody>
       </p:sp>
       <p:sp>
         <p:nvSpPr>
@@ -13760,6 +14136,10 @@
             <a:prstDash val="solid"/>
           </a:ln>
         </p:spPr>
+        <p:txBody>
+          <a:bodyPr/>
+          <a:p/>
+        </p:txBody>
       </p:sp>
       <p:sp>
         <p:nvSpPr>
@@ -13826,6 +14206,10 @@
             <a:prstDash val="solid"/>
           </a:ln>
         </p:spPr>
+        <p:txBody>
+          <a:bodyPr/>
+          <a:p/>
+        </p:txBody>
       </p:sp>
       <p:sp>
         <p:nvSpPr>
@@ -13892,6 +14276,10 @@
             <a:prstDash val="solid"/>
           </a:ln>
         </p:spPr>
+        <p:txBody>
+          <a:bodyPr/>
+          <a:p/>
+        </p:txBody>
       </p:sp>
       <p:sp>
         <p:nvSpPr>
@@ -13958,6 +14346,10 @@
             <a:prstDash val="solid"/>
           </a:ln>
         </p:spPr>
+        <p:txBody>
+          <a:bodyPr/>
+          <a:p/>
+        </p:txBody>
       </p:sp>
       <p:sp>
         <p:nvSpPr>
@@ -14024,6 +14416,10 @@
             <a:prstDash val="solid"/>
           </a:ln>
         </p:spPr>
+        <p:txBody>
+          <a:bodyPr/>
+          <a:p/>
+        </p:txBody>
       </p:sp>
       <p:sp>
         <p:nvSpPr>
@@ -14090,6 +14486,10 @@
             <a:prstDash val="solid"/>
           </a:ln>
         </p:spPr>
+        <p:txBody>
+          <a:bodyPr/>
+          <a:p/>
+        </p:txBody>
       </p:sp>
       <p:sp>
         <p:nvSpPr>
@@ -14156,6 +14556,10 @@
             <a:prstDash val="solid"/>
           </a:ln>
         </p:spPr>
+        <p:txBody>
+          <a:bodyPr/>
+          <a:p/>
+        </p:txBody>
       </p:sp>
       <p:sp>
         <p:nvSpPr>
@@ -14222,6 +14626,10 @@
             <a:prstDash val="solid"/>
           </a:ln>
         </p:spPr>
+        <p:txBody>
+          <a:bodyPr/>
+          <a:p/>
+        </p:txBody>
       </p:sp>
       <p:sp>
         <p:nvSpPr>
@@ -14288,6 +14696,10 @@
             <a:prstDash val="solid"/>
           </a:ln>
         </p:spPr>
+        <p:txBody>
+          <a:bodyPr/>
+          <a:p/>
+        </p:txBody>
       </p:sp>
       <p:sp>
         <p:nvSpPr>
@@ -14354,6 +14766,10 @@
             <a:prstDash val="solid"/>
           </a:ln>
         </p:spPr>
+        <p:txBody>
+          <a:bodyPr/>
+          <a:p/>
+        </p:txBody>
       </p:sp>
       <p:sp>
         <p:nvSpPr>
@@ -14420,6 +14836,10 @@
             <a:prstDash val="solid"/>
           </a:ln>
         </p:spPr>
+        <p:txBody>
+          <a:bodyPr/>
+          <a:p/>
+        </p:txBody>
       </p:sp>
       <p:sp>
         <p:nvSpPr>
@@ -14486,6 +14906,10 @@
             <a:prstDash val="solid"/>
           </a:ln>
         </p:spPr>
+        <p:txBody>
+          <a:bodyPr/>
+          <a:p/>
+        </p:txBody>
       </p:sp>
       <p:sp>
         <p:nvSpPr>
@@ -14552,6 +14976,10 @@
             <a:prstDash val="solid"/>
           </a:ln>
         </p:spPr>
+        <p:txBody>
+          <a:bodyPr/>
+          <a:p/>
+        </p:txBody>
       </p:sp>
       <p:sp>
         <p:nvSpPr>
@@ -14618,6 +15046,10 @@
             <a:prstDash val="solid"/>
           </a:ln>
         </p:spPr>
+        <p:txBody>
+          <a:bodyPr/>
+          <a:p/>
+        </p:txBody>
       </p:sp>
       <p:sp>
         <p:nvSpPr>
@@ -14684,6 +15116,10 @@
             <a:prstDash val="solid"/>
           </a:ln>
         </p:spPr>
+        <p:txBody>
+          <a:bodyPr/>
+          <a:p/>
+        </p:txBody>
       </p:sp>
       <p:sp>
         <p:nvSpPr>
@@ -14750,6 +15186,10 @@
             <a:prstDash val="solid"/>
           </a:ln>
         </p:spPr>
+        <p:txBody>
+          <a:bodyPr/>
+          <a:p/>
+        </p:txBody>
       </p:sp>
       <p:sp>
         <p:nvSpPr>
@@ -14816,6 +15256,10 @@
             <a:prstDash val="solid"/>
           </a:ln>
         </p:spPr>
+        <p:txBody>
+          <a:bodyPr/>
+          <a:p/>
+        </p:txBody>
       </p:sp>
       <p:sp>
         <p:nvSpPr>
@@ -14882,6 +15326,10 @@
             <a:prstDash val="solid"/>
           </a:ln>
         </p:spPr>
+        <p:txBody>
+          <a:bodyPr/>
+          <a:p/>
+        </p:txBody>
       </p:sp>
       <p:sp>
         <p:nvSpPr>
@@ -14948,6 +15396,10 @@
             <a:prstDash val="solid"/>
           </a:ln>
         </p:spPr>
+        <p:txBody>
+          <a:bodyPr/>
+          <a:p/>
+        </p:txBody>
       </p:sp>
       <p:sp>
         <p:nvSpPr>
@@ -15014,6 +15466,10 @@
             <a:prstDash val="solid"/>
           </a:ln>
         </p:spPr>
+        <p:txBody>
+          <a:bodyPr/>
+          <a:p/>
+        </p:txBody>
       </p:sp>
       <p:sp>
         <p:nvSpPr>
@@ -15080,6 +15536,10 @@
             <a:prstDash val="solid"/>
           </a:ln>
         </p:spPr>
+        <p:txBody>
+          <a:bodyPr/>
+          <a:p/>
+        </p:txBody>
       </p:sp>
       <p:sp>
         <p:nvSpPr>
@@ -15146,6 +15606,10 @@
             <a:prstDash val="solid"/>
           </a:ln>
         </p:spPr>
+        <p:txBody>
+          <a:bodyPr/>
+          <a:p/>
+        </p:txBody>
       </p:sp>
       <p:sp>
         <p:nvSpPr>
@@ -15212,6 +15676,10 @@
             <a:prstDash val="solid"/>
           </a:ln>
         </p:spPr>
+        <p:txBody>
+          <a:bodyPr/>
+          <a:p/>
+        </p:txBody>
       </p:sp>
       <p:sp>
         <p:nvSpPr>
@@ -15278,6 +15746,10 @@
             <a:prstDash val="solid"/>
           </a:ln>
         </p:spPr>
+        <p:txBody>
+          <a:bodyPr/>
+          <a:p/>
+        </p:txBody>
       </p:sp>
       <p:sp>
         <p:nvSpPr>
@@ -15344,6 +15816,10 @@
             <a:prstDash val="solid"/>
           </a:ln>
         </p:spPr>
+        <p:txBody>
+          <a:bodyPr/>
+          <a:p/>
+        </p:txBody>
       </p:sp>
       <p:sp>
         <p:nvSpPr>
@@ -15410,6 +15886,10 @@
             <a:prstDash val="solid"/>
           </a:ln>
         </p:spPr>
+        <p:txBody>
+          <a:bodyPr/>
+          <a:p/>
+        </p:txBody>
       </p:sp>
       <p:sp>
         <p:nvSpPr>
@@ -15476,6 +15956,10 @@
             <a:prstDash val="solid"/>
           </a:ln>
         </p:spPr>
+        <p:txBody>
+          <a:bodyPr/>
+          <a:p/>
+        </p:txBody>
       </p:sp>
       <p:sp>
         <p:nvSpPr>
@@ -15542,6 +16026,10 @@
             <a:prstDash val="solid"/>
           </a:ln>
         </p:spPr>
+        <p:txBody>
+          <a:bodyPr/>
+          <a:p/>
+        </p:txBody>
       </p:sp>
       <p:sp>
         <p:nvSpPr>
@@ -15608,6 +16096,10 @@
             <a:prstDash val="solid"/>
           </a:ln>
         </p:spPr>
+        <p:txBody>
+          <a:bodyPr/>
+          <a:p/>
+        </p:txBody>
       </p:sp>
       <p:sp>
         <p:nvSpPr>
@@ -15674,6 +16166,10 @@
             <a:prstDash val="solid"/>
           </a:ln>
         </p:spPr>
+        <p:txBody>
+          <a:bodyPr/>
+          <a:p/>
+        </p:txBody>
       </p:sp>
       <p:sp>
         <p:nvSpPr>
@@ -15740,6 +16236,10 @@
             <a:prstDash val="solid"/>
           </a:ln>
         </p:spPr>
+        <p:txBody>
+          <a:bodyPr/>
+          <a:p/>
+        </p:txBody>
       </p:sp>
       <p:sp>
         <p:nvSpPr>
@@ -15806,6 +16306,10 @@
             <a:prstDash val="solid"/>
           </a:ln>
         </p:spPr>
+        <p:txBody>
+          <a:bodyPr/>
+          <a:p/>
+        </p:txBody>
       </p:sp>
       <p:sp>
         <p:nvSpPr>
@@ -16027,6 +16531,10 @@
             <a:prstDash val="solid"/>
           </a:ln>
         </p:spPr>
+        <p:txBody>
+          <a:bodyPr/>
+          <a:p/>
+        </p:txBody>
       </p:sp>
       <p:sp>
         <p:nvSpPr>
@@ -16279,6 +16787,10 @@
             <a:prstDash val="solid"/>
           </a:ln>
         </p:spPr>
+        <p:txBody>
+          <a:bodyPr/>
+          <a:p/>
+        </p:txBody>
       </p:sp>
       <p:sp>
         <p:nvSpPr>
@@ -16382,6 +16894,10 @@
             <a:prstDash val="solid"/>
           </a:ln>
         </p:spPr>
+        <p:txBody>
+          <a:bodyPr/>
+          <a:p/>
+        </p:txBody>
       </p:sp>
       <p:sp>
         <p:nvSpPr>
@@ -16448,6 +16964,10 @@
             <a:prstDash val="solid"/>
           </a:ln>
         </p:spPr>
+        <p:txBody>
+          <a:bodyPr/>
+          <a:p/>
+        </p:txBody>
       </p:sp>
       <p:sp>
         <p:nvSpPr>
@@ -16514,6 +17034,10 @@
             <a:prstDash val="solid"/>
           </a:ln>
         </p:spPr>
+        <p:txBody>
+          <a:bodyPr/>
+          <a:p/>
+        </p:txBody>
       </p:sp>
       <p:sp>
         <p:nvSpPr>
@@ -16580,6 +17104,10 @@
             <a:prstDash val="solid"/>
           </a:ln>
         </p:spPr>
+        <p:txBody>
+          <a:bodyPr/>
+          <a:p/>
+        </p:txBody>
       </p:sp>
       <p:sp>
         <p:nvSpPr>
@@ -16646,6 +17174,10 @@
             <a:prstDash val="solid"/>
           </a:ln>
         </p:spPr>
+        <p:txBody>
+          <a:bodyPr/>
+          <a:p/>
+        </p:txBody>
       </p:sp>
       <p:sp>
         <p:nvSpPr>
@@ -16712,6 +17244,10 @@
             <a:prstDash val="solid"/>
           </a:ln>
         </p:spPr>
+        <p:txBody>
+          <a:bodyPr/>
+          <a:p/>
+        </p:txBody>
       </p:sp>
       <p:sp>
         <p:nvSpPr>
@@ -16778,6 +17314,10 @@
             <a:prstDash val="solid"/>
           </a:ln>
         </p:spPr>
+        <p:txBody>
+          <a:bodyPr/>
+          <a:p/>
+        </p:txBody>
       </p:sp>
       <p:sp>
         <p:nvSpPr>
@@ -16844,6 +17384,10 @@
             <a:prstDash val="solid"/>
           </a:ln>
         </p:spPr>
+        <p:txBody>
+          <a:bodyPr/>
+          <a:p/>
+        </p:txBody>
       </p:sp>
       <p:sp>
         <p:nvSpPr>
@@ -16910,6 +17454,10 @@
             <a:prstDash val="solid"/>
           </a:ln>
         </p:spPr>
+        <p:txBody>
+          <a:bodyPr/>
+          <a:p/>
+        </p:txBody>
       </p:sp>
       <p:sp>
         <p:nvSpPr>
@@ -16976,6 +17524,10 @@
             <a:prstDash val="solid"/>
           </a:ln>
         </p:spPr>
+        <p:txBody>
+          <a:bodyPr/>
+          <a:p/>
+        </p:txBody>
       </p:sp>
       <p:sp>
         <p:nvSpPr>
@@ -17042,6 +17594,10 @@
             <a:prstDash val="solid"/>
           </a:ln>
         </p:spPr>
+        <p:txBody>
+          <a:bodyPr/>
+          <a:p/>
+        </p:txBody>
       </p:sp>
       <p:sp>
         <p:nvSpPr>
@@ -17108,6 +17664,10 @@
             <a:prstDash val="solid"/>
           </a:ln>
         </p:spPr>
+        <p:txBody>
+          <a:bodyPr/>
+          <a:p/>
+        </p:txBody>
       </p:sp>
       <p:sp>
         <p:nvSpPr>
@@ -17174,6 +17734,10 @@
             <a:prstDash val="solid"/>
           </a:ln>
         </p:spPr>
+        <p:txBody>
+          <a:bodyPr/>
+          <a:p/>
+        </p:txBody>
       </p:sp>
       <p:sp>
         <p:nvSpPr>
@@ -17240,6 +17804,10 @@
             <a:prstDash val="solid"/>
           </a:ln>
         </p:spPr>
+        <p:txBody>
+          <a:bodyPr/>
+          <a:p/>
+        </p:txBody>
       </p:sp>
       <p:sp>
         <p:nvSpPr>
@@ -17306,6 +17874,10 @@
             <a:prstDash val="solid"/>
           </a:ln>
         </p:spPr>
+        <p:txBody>
+          <a:bodyPr/>
+          <a:p/>
+        </p:txBody>
       </p:sp>
       <p:sp>
         <p:nvSpPr>
@@ -17372,6 +17944,10 @@
             <a:prstDash val="solid"/>
           </a:ln>
         </p:spPr>
+        <p:txBody>
+          <a:bodyPr/>
+          <a:p/>
+        </p:txBody>
       </p:sp>
       <p:sp>
         <p:nvSpPr>
@@ -17438,6 +18014,10 @@
             <a:prstDash val="solid"/>
           </a:ln>
         </p:spPr>
+        <p:txBody>
+          <a:bodyPr/>
+          <a:p/>
+        </p:txBody>
       </p:sp>
       <p:sp>
         <p:nvSpPr>
@@ -17504,6 +18084,10 @@
             <a:prstDash val="solid"/>
           </a:ln>
         </p:spPr>
+        <p:txBody>
+          <a:bodyPr/>
+          <a:p/>
+        </p:txBody>
       </p:sp>
       <p:sp>
         <p:nvSpPr>
@@ -17570,6 +18154,10 @@
             <a:prstDash val="solid"/>
           </a:ln>
         </p:spPr>
+        <p:txBody>
+          <a:bodyPr/>
+          <a:p/>
+        </p:txBody>
       </p:sp>
       <p:sp>
         <p:nvSpPr>
@@ -17636,6 +18224,10 @@
             <a:prstDash val="solid"/>
           </a:ln>
         </p:spPr>
+        <p:txBody>
+          <a:bodyPr/>
+          <a:p/>
+        </p:txBody>
       </p:sp>
       <p:sp>
         <p:nvSpPr>
@@ -17702,6 +18294,10 @@
             <a:prstDash val="solid"/>
           </a:ln>
         </p:spPr>
+        <p:txBody>
+          <a:bodyPr/>
+          <a:p/>
+        </p:txBody>
       </p:sp>
       <p:sp>
         <p:nvSpPr>
@@ -17768,6 +18364,10 @@
             <a:prstDash val="solid"/>
           </a:ln>
         </p:spPr>
+        <p:txBody>
+          <a:bodyPr/>
+          <a:p/>
+        </p:txBody>
       </p:sp>
       <p:sp>
         <p:nvSpPr>
@@ -17834,6 +18434,10 @@
             <a:prstDash val="solid"/>
           </a:ln>
         </p:spPr>
+        <p:txBody>
+          <a:bodyPr/>
+          <a:p/>
+        </p:txBody>
       </p:sp>
       <p:sp>
         <p:nvSpPr>
@@ -17900,6 +18504,10 @@
             <a:prstDash val="solid"/>
           </a:ln>
         </p:spPr>
+        <p:txBody>
+          <a:bodyPr/>
+          <a:p/>
+        </p:txBody>
       </p:sp>
       <p:sp>
         <p:nvSpPr>
@@ -17966,6 +18574,10 @@
             <a:prstDash val="solid"/>
           </a:ln>
         </p:spPr>
+        <p:txBody>
+          <a:bodyPr/>
+          <a:p/>
+        </p:txBody>
       </p:sp>
       <p:sp>
         <p:nvSpPr>
@@ -18032,6 +18644,10 @@
             <a:prstDash val="solid"/>
           </a:ln>
         </p:spPr>
+        <p:txBody>
+          <a:bodyPr/>
+          <a:p/>
+        </p:txBody>
       </p:sp>
       <p:sp>
         <p:nvSpPr>
@@ -18098,6 +18714,10 @@
             <a:prstDash val="solid"/>
           </a:ln>
         </p:spPr>
+        <p:txBody>
+          <a:bodyPr/>
+          <a:p/>
+        </p:txBody>
       </p:sp>
       <p:sp>
         <p:nvSpPr>
@@ -18164,6 +18784,10 @@
             <a:prstDash val="solid"/>
           </a:ln>
         </p:spPr>
+        <p:txBody>
+          <a:bodyPr/>
+          <a:p/>
+        </p:txBody>
       </p:sp>
       <p:sp>
         <p:nvSpPr>
@@ -18230,6 +18854,10 @@
             <a:prstDash val="solid"/>
           </a:ln>
         </p:spPr>
+        <p:txBody>
+          <a:bodyPr/>
+          <a:p/>
+        </p:txBody>
       </p:sp>
       <p:sp>
         <p:nvSpPr>
@@ -18296,6 +18924,10 @@
             <a:prstDash val="solid"/>
           </a:ln>
         </p:spPr>
+        <p:txBody>
+          <a:bodyPr/>
+          <a:p/>
+        </p:txBody>
       </p:sp>
       <p:sp>
         <p:nvSpPr>
@@ -18362,6 +18994,10 @@
             <a:prstDash val="solid"/>
           </a:ln>
         </p:spPr>
+        <p:txBody>
+          <a:bodyPr/>
+          <a:p/>
+        </p:txBody>
       </p:sp>
       <p:sp>
         <p:nvSpPr>
@@ -18428,6 +19064,10 @@
             <a:prstDash val="solid"/>
           </a:ln>
         </p:spPr>
+        <p:txBody>
+          <a:bodyPr/>
+          <a:p/>
+        </p:txBody>
       </p:sp>
       <p:sp>
         <p:nvSpPr>
@@ -18494,6 +19134,10 @@
             <a:prstDash val="solid"/>
           </a:ln>
         </p:spPr>
+        <p:txBody>
+          <a:bodyPr/>
+          <a:p/>
+        </p:txBody>
       </p:sp>
       <p:sp>
         <p:nvSpPr>
@@ -18560,6 +19204,10 @@
             <a:prstDash val="solid"/>
           </a:ln>
         </p:spPr>
+        <p:txBody>
+          <a:bodyPr/>
+          <a:p/>
+        </p:txBody>
       </p:sp>
       <p:sp>
         <p:nvSpPr>
@@ -18626,6 +19274,10 @@
             <a:prstDash val="solid"/>
           </a:ln>
         </p:spPr>
+        <p:txBody>
+          <a:bodyPr/>
+          <a:p/>
+        </p:txBody>
       </p:sp>
       <p:sp>
         <p:nvSpPr>
@@ -18692,6 +19344,10 @@
             <a:prstDash val="solid"/>
           </a:ln>
         </p:spPr>
+        <p:txBody>
+          <a:bodyPr/>
+          <a:p/>
+        </p:txBody>
       </p:sp>
       <p:sp>
         <p:nvSpPr>
@@ -18758,6 +19414,10 @@
             <a:prstDash val="solid"/>
           </a:ln>
         </p:spPr>
+        <p:txBody>
+          <a:bodyPr/>
+          <a:p/>
+        </p:txBody>
       </p:sp>
       <p:sp>
         <p:nvSpPr>
@@ -18824,6 +19484,10 @@
             <a:prstDash val="solid"/>
           </a:ln>
         </p:spPr>
+        <p:txBody>
+          <a:bodyPr/>
+          <a:p/>
+        </p:txBody>
       </p:sp>
       <p:sp>
         <p:nvSpPr>
@@ -18890,6 +19554,10 @@
             <a:prstDash val="solid"/>
           </a:ln>
         </p:spPr>
+        <p:txBody>
+          <a:bodyPr/>
+          <a:p/>
+        </p:txBody>
       </p:sp>
       <p:sp>
         <p:nvSpPr>
@@ -18956,6 +19624,10 @@
             <a:prstDash val="solid"/>
           </a:ln>
         </p:spPr>
+        <p:txBody>
+          <a:bodyPr/>
+          <a:p/>
+        </p:txBody>
       </p:sp>
       <p:sp>
         <p:nvSpPr>
@@ -19022,6 +19694,10 @@
             <a:prstDash val="solid"/>
           </a:ln>
         </p:spPr>
+        <p:txBody>
+          <a:bodyPr/>
+          <a:p/>
+        </p:txBody>
       </p:sp>
       <p:sp>
         <p:nvSpPr>
@@ -19088,6 +19764,10 @@
             <a:prstDash val="solid"/>
           </a:ln>
         </p:spPr>
+        <p:txBody>
+          <a:bodyPr/>
+          <a:p/>
+        </p:txBody>
       </p:sp>
       <p:sp>
         <p:nvSpPr>
@@ -19154,6 +19834,10 @@
             <a:prstDash val="solid"/>
           </a:ln>
         </p:spPr>
+        <p:txBody>
+          <a:bodyPr/>
+          <a:p/>
+        </p:txBody>
       </p:sp>
       <p:sp>
         <p:nvSpPr>
@@ -19220,6 +19904,10 @@
             <a:prstDash val="solid"/>
           </a:ln>
         </p:spPr>
+        <p:txBody>
+          <a:bodyPr/>
+          <a:p/>
+        </p:txBody>
       </p:sp>
       <p:sp>
         <p:nvSpPr>
@@ -19286,6 +19974,10 @@
             <a:prstDash val="solid"/>
           </a:ln>
         </p:spPr>
+        <p:txBody>
+          <a:bodyPr/>
+          <a:p/>
+        </p:txBody>
       </p:sp>
       <p:sp>
         <p:nvSpPr>
@@ -19352,6 +20044,10 @@
             <a:prstDash val="solid"/>
           </a:ln>
         </p:spPr>
+        <p:txBody>
+          <a:bodyPr/>
+          <a:p/>
+        </p:txBody>
       </p:sp>
       <p:sp>
         <p:nvSpPr>
@@ -19418,6 +20114,10 @@
             <a:prstDash val="solid"/>
           </a:ln>
         </p:spPr>
+        <p:txBody>
+          <a:bodyPr/>
+          <a:p/>
+        </p:txBody>
       </p:sp>
       <p:sp>
         <p:nvSpPr>
@@ -19484,6 +20184,10 @@
             <a:prstDash val="solid"/>
           </a:ln>
         </p:spPr>
+        <p:txBody>
+          <a:bodyPr/>
+          <a:p/>
+        </p:txBody>
       </p:sp>
       <p:sp>
         <p:nvSpPr>
@@ -19550,6 +20254,10 @@
             <a:prstDash val="solid"/>
           </a:ln>
         </p:spPr>
+        <p:txBody>
+          <a:bodyPr/>
+          <a:p/>
+        </p:txBody>
       </p:sp>
       <p:sp>
         <p:nvSpPr>
@@ -19616,6 +20324,10 @@
             <a:prstDash val="solid"/>
           </a:ln>
         </p:spPr>
+        <p:txBody>
+          <a:bodyPr/>
+          <a:p/>
+        </p:txBody>
       </p:sp>
       <p:sp>
         <p:nvSpPr>
@@ -19682,6 +20394,10 @@
             <a:prstDash val="solid"/>
           </a:ln>
         </p:spPr>
+        <p:txBody>
+          <a:bodyPr/>
+          <a:p/>
+        </p:txBody>
       </p:sp>
       <p:sp>
         <p:nvSpPr>
@@ -19748,6 +20464,10 @@
             <a:prstDash val="solid"/>
           </a:ln>
         </p:spPr>
+        <p:txBody>
+          <a:bodyPr/>
+          <a:p/>
+        </p:txBody>
       </p:sp>
       <p:sp>
         <p:nvSpPr>
@@ -19814,6 +20534,10 @@
             <a:prstDash val="solid"/>
           </a:ln>
         </p:spPr>
+        <p:txBody>
+          <a:bodyPr/>
+          <a:p/>
+        </p:txBody>
       </p:sp>
       <p:sp>
         <p:nvSpPr>
@@ -19880,6 +20604,10 @@
             <a:prstDash val="solid"/>
           </a:ln>
         </p:spPr>
+        <p:txBody>
+          <a:bodyPr/>
+          <a:p/>
+        </p:txBody>
       </p:sp>
       <p:sp>
         <p:nvSpPr>
@@ -19946,6 +20674,10 @@
             <a:prstDash val="solid"/>
           </a:ln>
         </p:spPr>
+        <p:txBody>
+          <a:bodyPr/>
+          <a:p/>
+        </p:txBody>
       </p:sp>
       <p:sp>
         <p:nvSpPr>
@@ -20012,6 +20744,10 @@
             <a:prstDash val="solid"/>
           </a:ln>
         </p:spPr>
+        <p:txBody>
+          <a:bodyPr/>
+          <a:p/>
+        </p:txBody>
       </p:sp>
       <p:sp>
         <p:nvSpPr>
@@ -20078,6 +20814,10 @@
             <a:prstDash val="solid"/>
           </a:ln>
         </p:spPr>
+        <p:txBody>
+          <a:bodyPr/>
+          <a:p/>
+        </p:txBody>
       </p:sp>
       <p:sp>
         <p:nvSpPr>
@@ -20144,6 +20884,10 @@
             <a:prstDash val="solid"/>
           </a:ln>
         </p:spPr>
+        <p:txBody>
+          <a:bodyPr/>
+          <a:p/>
+        </p:txBody>
       </p:sp>
       <p:sp>
         <p:nvSpPr>
@@ -20210,6 +20954,10 @@
             <a:prstDash val="solid"/>
           </a:ln>
         </p:spPr>
+        <p:txBody>
+          <a:bodyPr/>
+          <a:p/>
+        </p:txBody>
       </p:sp>
       <p:sp>
         <p:nvSpPr>
@@ -20276,6 +21024,10 @@
             <a:prstDash val="solid"/>
           </a:ln>
         </p:spPr>
+        <p:txBody>
+          <a:bodyPr/>
+          <a:p/>
+        </p:txBody>
       </p:sp>
       <p:sp>
         <p:nvSpPr>
@@ -20342,6 +21094,10 @@
             <a:prstDash val="solid"/>
           </a:ln>
         </p:spPr>
+        <p:txBody>
+          <a:bodyPr/>
+          <a:p/>
+        </p:txBody>
       </p:sp>
       <p:sp>
         <p:nvSpPr>
@@ -20408,6 +21164,10 @@
             <a:prstDash val="solid"/>
           </a:ln>
         </p:spPr>
+        <p:txBody>
+          <a:bodyPr/>
+          <a:p/>
+        </p:txBody>
       </p:sp>
       <p:sp>
         <p:nvSpPr>
@@ -20474,6 +21234,10 @@
             <a:prstDash val="solid"/>
           </a:ln>
         </p:spPr>
+        <p:txBody>
+          <a:bodyPr/>
+          <a:p/>
+        </p:txBody>
       </p:sp>
       <p:sp>
         <p:nvSpPr>
@@ -20540,6 +21304,10 @@
             <a:prstDash val="solid"/>
           </a:ln>
         </p:spPr>
+        <p:txBody>
+          <a:bodyPr/>
+          <a:p/>
+        </p:txBody>
       </p:sp>
       <p:sp>
         <p:nvSpPr>
@@ -20761,6 +21529,10 @@
             <a:prstDash val="solid"/>
           </a:ln>
         </p:spPr>
+        <p:txBody>
+          <a:bodyPr/>
+          <a:p/>
+        </p:txBody>
       </p:sp>
       <p:sp>
         <p:nvSpPr>
@@ -21013,6 +21785,10 @@
             <a:prstDash val="solid"/>
           </a:ln>
         </p:spPr>
+        <p:txBody>
+          <a:bodyPr/>
+          <a:p/>
+        </p:txBody>
       </p:sp>
       <p:sp>
         <p:nvSpPr>
@@ -21118,6 +21894,10 @@
             <a:prstDash val="solid"/>
           </a:ln>
         </p:spPr>
+        <p:txBody>
+          <a:bodyPr/>
+          <a:p/>
+        </p:txBody>
       </p:sp>
       <p:sp>
         <p:nvSpPr>
@@ -21264,6 +22044,10 @@
             <a:prstDash val="solid"/>
           </a:ln>
         </p:spPr>
+        <p:txBody>
+          <a:bodyPr/>
+          <a:p/>
+        </p:txBody>
       </p:sp>
       <p:sp>
         <p:nvSpPr>
@@ -21410,6 +22194,10 @@
             <a:prstDash val="solid"/>
           </a:ln>
         </p:spPr>
+        <p:txBody>
+          <a:bodyPr/>
+          <a:p/>
+        </p:txBody>
       </p:sp>
       <p:sp>
         <p:nvSpPr>
@@ -21556,6 +22344,10 @@
             <a:prstDash val="solid"/>
           </a:ln>
         </p:spPr>
+        <p:txBody>
+          <a:bodyPr/>
+          <a:p/>
+        </p:txBody>
       </p:sp>
       <p:sp>
         <p:nvSpPr>
@@ -21702,6 +22494,10 @@
             <a:prstDash val="solid"/>
           </a:ln>
         </p:spPr>
+        <p:txBody>
+          <a:bodyPr/>
+          <a:p/>
+        </p:txBody>
       </p:sp>
       <p:sp>
         <p:nvSpPr>
@@ -21848,6 +22644,10 @@
             <a:prstDash val="solid"/>
           </a:ln>
         </p:spPr>
+        <p:txBody>
+          <a:bodyPr/>
+          <a:p/>
+        </p:txBody>
       </p:sp>
       <p:sp>
         <p:nvSpPr>
@@ -22093,6 +22893,10 @@
             <a:prstDash val="solid"/>
           </a:ln>
         </p:spPr>
+        <p:txBody>
+          <a:bodyPr/>
+          <a:p/>
+        </p:txBody>
       </p:sp>
       <p:sp>
         <p:nvSpPr>
@@ -22190,6 +22994,10 @@
             <a:prstDash val="solid"/>
           </a:ln>
         </p:spPr>
+        <p:txBody>
+          <a:bodyPr/>
+          <a:p/>
+        </p:txBody>
       </p:sp>
       <p:sp>
         <p:nvSpPr>
@@ -22253,6 +23061,10 @@
             <a:prstDash val="solid"/>
           </a:ln>
         </p:spPr>
+        <p:txBody>
+          <a:bodyPr/>
+          <a:p/>
+        </p:txBody>
       </p:sp>
       <p:sp>
         <p:nvSpPr>
@@ -22400,6 +23212,10 @@
             <a:prstDash val="solid"/>
           </a:ln>
         </p:spPr>
+        <p:txBody>
+          <a:bodyPr/>
+          <a:p/>
+        </p:txBody>
       </p:sp>
       <p:sp>
         <p:nvSpPr>
@@ -22652,6 +23468,10 @@
             <a:prstDash val="solid"/>
           </a:ln>
         </p:spPr>
+        <p:txBody>
+          <a:bodyPr/>
+          <a:p/>
+        </p:txBody>
       </p:sp>
       <p:sp>
         <p:nvSpPr>
@@ -22757,6 +23577,10 @@
             <a:prstDash val="solid"/>
           </a:ln>
         </p:spPr>
+        <p:txBody>
+          <a:bodyPr/>
+          <a:p/>
+        </p:txBody>
       </p:sp>
       <p:sp>
         <p:nvSpPr>
@@ -22903,6 +23727,10 @@
             <a:prstDash val="solid"/>
           </a:ln>
         </p:spPr>
+        <p:txBody>
+          <a:bodyPr/>
+          <a:p/>
+        </p:txBody>
       </p:sp>
       <p:sp>
         <p:nvSpPr>
@@ -23049,6 +23877,10 @@
             <a:prstDash val="solid"/>
           </a:ln>
         </p:spPr>
+        <p:txBody>
+          <a:bodyPr/>
+          <a:p/>
+        </p:txBody>
       </p:sp>
       <p:sp>
         <p:nvSpPr>
@@ -23195,6 +24027,10 @@
             <a:prstDash val="solid"/>
           </a:ln>
         </p:spPr>
+        <p:txBody>
+          <a:bodyPr/>
+          <a:p/>
+        </p:txBody>
       </p:sp>
       <p:sp>
         <p:nvSpPr>
@@ -23341,6 +24177,10 @@
             <a:prstDash val="solid"/>
           </a:ln>
         </p:spPr>
+        <p:txBody>
+          <a:bodyPr/>
+          <a:p/>
+        </p:txBody>
       </p:sp>
       <p:sp>
         <p:nvSpPr>
@@ -23487,6 +24327,10 @@
             <a:prstDash val="solid"/>
           </a:ln>
         </p:spPr>
+        <p:txBody>
+          <a:bodyPr/>
+          <a:p/>
+        </p:txBody>
       </p:sp>
       <p:sp>
         <p:nvSpPr>
@@ -23732,6 +24576,10 @@
             <a:prstDash val="solid"/>
           </a:ln>
         </p:spPr>
+        <p:txBody>
+          <a:bodyPr/>
+          <a:p/>
+        </p:txBody>
       </p:sp>
       <p:sp>
         <p:nvSpPr>
@@ -23829,6 +24677,10 @@
             <a:prstDash val="solid"/>
           </a:ln>
         </p:spPr>
+        <p:txBody>
+          <a:bodyPr/>
+          <a:p/>
+        </p:txBody>
       </p:sp>
       <p:sp>
         <p:nvSpPr>
@@ -23892,6 +24744,10 @@
             <a:prstDash val="solid"/>
           </a:ln>
         </p:spPr>
+        <p:txBody>
+          <a:bodyPr/>
+          <a:p/>
+        </p:txBody>
       </p:sp>
       <p:sp>
         <p:nvSpPr>
@@ -24039,6 +24895,10 @@
             <a:prstDash val="solid"/>
           </a:ln>
         </p:spPr>
+        <p:txBody>
+          <a:bodyPr/>
+          <a:p/>
+        </p:txBody>
       </p:sp>
       <p:sp>
         <p:nvSpPr>
@@ -24291,6 +25151,10 @@
             <a:prstDash val="solid"/>
           </a:ln>
         </p:spPr>
+        <p:txBody>
+          <a:bodyPr/>
+          <a:p/>
+        </p:txBody>
       </p:sp>
       <p:sp>
         <p:nvSpPr>
@@ -24396,6 +25260,10 @@
             <a:prstDash val="solid"/>
           </a:ln>
         </p:spPr>
+        <p:txBody>
+          <a:bodyPr/>
+          <a:p/>
+        </p:txBody>
       </p:sp>
       <p:sp>
         <p:nvSpPr>
@@ -24542,6 +25410,10 @@
             <a:prstDash val="solid"/>
           </a:ln>
         </p:spPr>
+        <p:txBody>
+          <a:bodyPr/>
+          <a:p/>
+        </p:txBody>
       </p:sp>
       <p:sp>
         <p:nvSpPr>
@@ -24688,6 +25560,10 @@
             <a:prstDash val="solid"/>
           </a:ln>
         </p:spPr>
+        <p:txBody>
+          <a:bodyPr/>
+          <a:p/>
+        </p:txBody>
       </p:sp>
       <p:sp>
         <p:nvSpPr>
@@ -24834,6 +25710,10 @@
             <a:prstDash val="solid"/>
           </a:ln>
         </p:spPr>
+        <p:txBody>
+          <a:bodyPr/>
+          <a:p/>
+        </p:txBody>
       </p:sp>
       <p:sp>
         <p:nvSpPr>
@@ -24980,6 +25860,10 @@
             <a:prstDash val="solid"/>
           </a:ln>
         </p:spPr>
+        <p:txBody>
+          <a:bodyPr/>
+          <a:p/>
+        </p:txBody>
       </p:sp>
       <p:sp>
         <p:nvSpPr>
@@ -25126,6 +26010,10 @@
             <a:prstDash val="solid"/>
           </a:ln>
         </p:spPr>
+        <p:txBody>
+          <a:bodyPr/>
+          <a:p/>
+        </p:txBody>
       </p:sp>
       <p:sp>
         <p:nvSpPr>
@@ -25356,6 +26244,10 @@
             <a:prstDash val="solid"/>
           </a:ln>
         </p:spPr>
+        <p:txBody>
+          <a:bodyPr/>
+          <a:p/>
+        </p:txBody>
       </p:sp>
       <p:sp>
         <p:nvSpPr>
@@ -25453,6 +26345,10 @@
             <a:prstDash val="solid"/>
           </a:ln>
         </p:spPr>
+        <p:txBody>
+          <a:bodyPr/>
+          <a:p/>
+        </p:txBody>
       </p:sp>
       <p:sp>
         <p:nvSpPr>
@@ -25516,6 +26412,10 @@
             <a:prstDash val="solid"/>
           </a:ln>
         </p:spPr>
+        <p:txBody>
+          <a:bodyPr/>
+          <a:p/>
+        </p:txBody>
       </p:sp>
       <p:sp>
         <p:nvSpPr>
@@ -25663,6 +26563,10 @@
             <a:prstDash val="solid"/>
           </a:ln>
         </p:spPr>
+        <p:txBody>
+          <a:bodyPr/>
+          <a:p/>
+        </p:txBody>
       </p:sp>
       <p:sp>
         <p:nvSpPr>
@@ -25915,6 +26819,10 @@
             <a:prstDash val="solid"/>
           </a:ln>
         </p:spPr>
+        <p:txBody>
+          <a:bodyPr/>
+          <a:p/>
+        </p:txBody>
       </p:sp>
       <p:sp>
         <p:nvSpPr>
@@ -26020,6 +26928,10 @@
             <a:prstDash val="solid"/>
           </a:ln>
         </p:spPr>
+        <p:txBody>
+          <a:bodyPr/>
+          <a:p/>
+        </p:txBody>
       </p:sp>
       <p:sp>
         <p:nvSpPr>
@@ -26166,6 +27078,10 @@
             <a:prstDash val="solid"/>
           </a:ln>
         </p:spPr>
+        <p:txBody>
+          <a:bodyPr/>
+          <a:p/>
+        </p:txBody>
       </p:sp>
       <p:sp>
         <p:nvSpPr>
@@ -26312,6 +27228,10 @@
             <a:prstDash val="solid"/>
           </a:ln>
         </p:spPr>
+        <p:txBody>
+          <a:bodyPr/>
+          <a:p/>
+        </p:txBody>
       </p:sp>
       <p:sp>
         <p:nvSpPr>
@@ -26458,6 +27378,10 @@
             <a:prstDash val="solid"/>
           </a:ln>
         </p:spPr>
+        <p:txBody>
+          <a:bodyPr/>
+          <a:p/>
+        </p:txBody>
       </p:sp>
       <p:sp>
         <p:nvSpPr>
@@ -26604,6 +27528,10 @@
             <a:prstDash val="solid"/>
           </a:ln>
         </p:spPr>
+        <p:txBody>
+          <a:bodyPr/>
+          <a:p/>
+        </p:txBody>
       </p:sp>
       <p:sp>
         <p:nvSpPr>
@@ -26750,6 +27678,10 @@
             <a:prstDash val="solid"/>
           </a:ln>
         </p:spPr>
+        <p:txBody>
+          <a:bodyPr/>
+          <a:p/>
+        </p:txBody>
       </p:sp>
       <p:sp>
         <p:nvSpPr>
@@ -26995,6 +27927,10 @@
             <a:prstDash val="solid"/>
           </a:ln>
         </p:spPr>
+        <p:txBody>
+          <a:bodyPr/>
+          <a:p/>
+        </p:txBody>
       </p:sp>
       <p:sp>
         <p:nvSpPr>
@@ -27092,6 +28028,10 @@
             <a:prstDash val="solid"/>
           </a:ln>
         </p:spPr>
+        <p:txBody>
+          <a:bodyPr/>
+          <a:p/>
+        </p:txBody>
       </p:sp>
       <p:sp>
         <p:nvSpPr>
@@ -27155,6 +28095,10 @@
             <a:prstDash val="solid"/>
           </a:ln>
         </p:spPr>
+        <p:txBody>
+          <a:bodyPr/>
+          <a:p/>
+        </p:txBody>
       </p:sp>
       <p:sp>
         <p:nvSpPr>
@@ -27302,6 +28246,10 @@
             <a:prstDash val="solid"/>
           </a:ln>
         </p:spPr>
+        <p:txBody>
+          <a:bodyPr/>
+          <a:p/>
+        </p:txBody>
       </p:sp>
       <p:sp>
         <p:nvSpPr>
@@ -27554,6 +28502,10 @@
             <a:prstDash val="solid"/>
           </a:ln>
         </p:spPr>
+        <p:txBody>
+          <a:bodyPr/>
+          <a:p/>
+        </p:txBody>
       </p:sp>
       <p:sp>
         <p:nvSpPr>
@@ -27659,6 +28611,10 @@
             <a:prstDash val="solid"/>
           </a:ln>
         </p:spPr>
+        <p:txBody>
+          <a:bodyPr/>
+          <a:p/>
+        </p:txBody>
       </p:sp>
       <p:sp>
         <p:nvSpPr>
@@ -27722,6 +28678,10 @@
             <a:prstDash val="solid"/>
           </a:ln>
         </p:spPr>
+        <p:txBody>
+          <a:bodyPr/>
+          <a:p/>
+        </p:txBody>
       </p:sp>
       <p:sp>
         <p:nvSpPr>
@@ -27823,6 +28783,10 @@
             <a:prstDash val="solid"/>
           </a:ln>
         </p:spPr>
+        <p:txBody>
+          <a:bodyPr/>
+          <a:p/>
+        </p:txBody>
       </p:sp>
       <p:sp>
         <p:nvSpPr>
@@ -27924,6 +28888,10 @@
             <a:prstDash val="solid"/>
           </a:ln>
         </p:spPr>
+        <p:txBody>
+          <a:bodyPr/>
+          <a:p/>
+        </p:txBody>
       </p:sp>
       <p:sp>
         <p:nvSpPr>
@@ -28025,6 +28993,10 @@
             <a:prstDash val="solid"/>
           </a:ln>
         </p:spPr>
+        <p:txBody>
+          <a:bodyPr/>
+          <a:p/>
+        </p:txBody>
       </p:sp>
       <p:sp>
         <p:nvSpPr>
@@ -28126,6 +29098,10 @@
             <a:prstDash val="solid"/>
           </a:ln>
         </p:spPr>
+        <p:txBody>
+          <a:bodyPr/>
+          <a:p/>
+        </p:txBody>
       </p:sp>
       <p:sp>
         <p:nvSpPr>
@@ -28227,6 +29203,10 @@
             <a:prstDash val="solid"/>
           </a:ln>
         </p:spPr>
+        <p:txBody>
+          <a:bodyPr/>
+          <a:p/>
+        </p:txBody>
       </p:sp>
       <p:sp>
         <p:nvSpPr>
@@ -28292,6 +29272,10 @@
             <a:prstDash val="solid"/>
           </a:ln>
         </p:spPr>
+        <p:txBody>
+          <a:bodyPr/>
+          <a:p/>
+        </p:txBody>
       </p:sp>
       <p:sp>
         <p:nvSpPr>
@@ -28353,6 +29337,10 @@
             <a:prstDash val="solid"/>
           </a:ln>
         </p:spPr>
+        <p:txBody>
+          <a:bodyPr/>
+          <a:p/>
+        </p:txBody>
       </p:sp>
       <p:sp>
         <p:nvSpPr>
@@ -28419,6 +29407,10 @@
             <a:prstDash val="solid"/>
           </a:ln>
         </p:spPr>
+        <p:txBody>
+          <a:bodyPr/>
+          <a:p/>
+        </p:txBody>
       </p:sp>
       <p:sp>
         <p:nvSpPr>
@@ -28485,6 +29477,10 @@
             <a:prstDash val="solid"/>
           </a:ln>
         </p:spPr>
+        <p:txBody>
+          <a:bodyPr/>
+          <a:p/>
+        </p:txBody>
       </p:sp>
       <p:sp>
         <p:nvSpPr>
@@ -28551,6 +29547,10 @@
             <a:prstDash val="solid"/>
           </a:ln>
         </p:spPr>
+        <p:txBody>
+          <a:bodyPr/>
+          <a:p/>
+        </p:txBody>
       </p:sp>
       <p:sp>
         <p:nvSpPr>
@@ -28617,6 +29617,10 @@
             <a:prstDash val="solid"/>
           </a:ln>
         </p:spPr>
+        <p:txBody>
+          <a:bodyPr/>
+          <a:p/>
+        </p:txBody>
       </p:sp>
       <p:sp>
         <p:nvSpPr>
@@ -28683,6 +29687,10 @@
             <a:prstDash val="solid"/>
           </a:ln>
         </p:spPr>
+        <p:txBody>
+          <a:bodyPr/>
+          <a:p/>
+        </p:txBody>
       </p:sp>
       <p:sp>
         <p:nvSpPr>
@@ -28749,6 +29757,10 @@
             <a:prstDash val="solid"/>
           </a:ln>
         </p:spPr>
+        <p:txBody>
+          <a:bodyPr/>
+          <a:p/>
+        </p:txBody>
       </p:sp>
       <p:sp>
         <p:nvSpPr>
@@ -28815,6 +29827,10 @@
             <a:prstDash val="solid"/>
           </a:ln>
         </p:spPr>
+        <p:txBody>
+          <a:bodyPr/>
+          <a:p/>
+        </p:txBody>
       </p:sp>
       <p:sp>
         <p:nvSpPr>
@@ -29036,6 +30052,10 @@
             <a:prstDash val="solid"/>
           </a:ln>
         </p:spPr>
+        <p:txBody>
+          <a:bodyPr/>
+          <a:p/>
+        </p:txBody>
       </p:sp>
       <p:sp>
         <p:nvSpPr>
@@ -29288,6 +30308,10 @@
             <a:prstDash val="solid"/>
           </a:ln>
         </p:spPr>
+        <p:txBody>
+          <a:bodyPr/>
+          <a:p/>
+        </p:txBody>
       </p:sp>
       <p:sp>
         <p:nvSpPr>
@@ -29393,6 +30417,10 @@
             <a:prstDash val="solid"/>
           </a:ln>
         </p:spPr>
+        <p:txBody>
+          <a:bodyPr/>
+          <a:p/>
+        </p:txBody>
       </p:sp>
       <p:sp>
         <p:nvSpPr>
@@ -29539,6 +30567,10 @@
             <a:prstDash val="solid"/>
           </a:ln>
         </p:spPr>
+        <p:txBody>
+          <a:bodyPr/>
+          <a:p/>
+        </p:txBody>
       </p:sp>
       <p:sp>
         <p:nvSpPr>
@@ -29685,6 +30717,10 @@
             <a:prstDash val="solid"/>
           </a:ln>
         </p:spPr>
+        <p:txBody>
+          <a:bodyPr/>
+          <a:p/>
+        </p:txBody>
       </p:sp>
       <p:sp>
         <p:nvSpPr>
@@ -29831,6 +30867,10 @@
             <a:prstDash val="solid"/>
           </a:ln>
         </p:spPr>
+        <p:txBody>
+          <a:bodyPr/>
+          <a:p/>
+        </p:txBody>
       </p:sp>
       <p:sp>
         <p:nvSpPr>
@@ -29977,6 +31017,10 @@
             <a:prstDash val="solid"/>
           </a:ln>
         </p:spPr>
+        <p:txBody>
+          <a:bodyPr/>
+          <a:p/>
+        </p:txBody>
       </p:sp>
       <p:sp>
         <p:nvSpPr>
@@ -30123,6 +31167,10 @@
             <a:prstDash val="solid"/>
           </a:ln>
         </p:spPr>
+        <p:txBody>
+          <a:bodyPr/>
+          <a:p/>
+        </p:txBody>
       </p:sp>
       <p:sp>
         <p:nvSpPr>
@@ -30368,6 +31416,10 @@
             <a:prstDash val="solid"/>
           </a:ln>
         </p:spPr>
+        <p:txBody>
+          <a:bodyPr/>
+          <a:p/>
+        </p:txBody>
       </p:sp>
       <p:sp>
         <p:nvSpPr>
@@ -30465,6 +31517,10 @@
             <a:prstDash val="solid"/>
           </a:ln>
         </p:spPr>
+        <p:txBody>
+          <a:bodyPr/>
+          <a:p/>
+        </p:txBody>
       </p:sp>
       <p:sp>
         <p:nvSpPr>
@@ -30528,6 +31584,10 @@
             <a:prstDash val="solid"/>
           </a:ln>
         </p:spPr>
+        <p:txBody>
+          <a:bodyPr/>
+          <a:p/>
+        </p:txBody>
       </p:sp>
       <p:sp>
         <p:nvSpPr>
@@ -30675,6 +31735,10 @@
             <a:prstDash val="solid"/>
           </a:ln>
         </p:spPr>
+        <p:txBody>
+          <a:bodyPr/>
+          <a:p/>
+        </p:txBody>
       </p:sp>
       <p:sp>
         <p:nvSpPr>
@@ -30927,6 +31991,10 @@
             <a:prstDash val="solid"/>
           </a:ln>
         </p:spPr>
+        <p:txBody>
+          <a:bodyPr/>
+          <a:p/>
+        </p:txBody>
       </p:sp>
       <p:sp>
         <p:nvSpPr>
@@ -31032,6 +32100,10 @@
             <a:prstDash val="solid"/>
           </a:ln>
         </p:spPr>
+        <p:txBody>
+          <a:bodyPr/>
+          <a:p/>
+        </p:txBody>
       </p:sp>
       <p:sp>
         <p:nvSpPr>
@@ -31178,6 +32250,10 @@
             <a:prstDash val="solid"/>
           </a:ln>
         </p:spPr>
+        <p:txBody>
+          <a:bodyPr/>
+          <a:p/>
+        </p:txBody>
       </p:sp>
       <p:sp>
         <p:nvSpPr>
@@ -31324,6 +32400,10 @@
             <a:prstDash val="solid"/>
           </a:ln>
         </p:spPr>
+        <p:txBody>
+          <a:bodyPr/>
+          <a:p/>
+        </p:txBody>
       </p:sp>
       <p:sp>
         <p:nvSpPr>
@@ -31470,6 +32550,10 @@
             <a:prstDash val="solid"/>
           </a:ln>
         </p:spPr>
+        <p:txBody>
+          <a:bodyPr/>
+          <a:p/>
+        </p:txBody>
       </p:sp>
       <p:sp>
         <p:nvSpPr>
@@ -31616,6 +32700,10 @@
             <a:prstDash val="solid"/>
           </a:ln>
         </p:spPr>
+        <p:txBody>
+          <a:bodyPr/>
+          <a:p/>
+        </p:txBody>
       </p:sp>
       <p:sp>
         <p:nvSpPr>
@@ -31762,6 +32850,10 @@
             <a:prstDash val="solid"/>
           </a:ln>
         </p:spPr>
+        <p:txBody>
+          <a:bodyPr/>
+          <a:p/>
+        </p:txBody>
       </p:sp>
       <p:sp>
         <p:nvSpPr>
@@ -32007,6 +33099,10 @@
             <a:prstDash val="solid"/>
           </a:ln>
         </p:spPr>
+        <p:txBody>
+          <a:bodyPr/>
+          <a:p/>
+        </p:txBody>
       </p:sp>
       <p:sp>
         <p:nvSpPr>
@@ -32104,6 +33200,10 @@
             <a:prstDash val="solid"/>
           </a:ln>
         </p:spPr>
+        <p:txBody>
+          <a:bodyPr/>
+          <a:p/>
+        </p:txBody>
       </p:sp>
       <p:sp>
         <p:nvSpPr>
@@ -32167,6 +33267,10 @@
             <a:prstDash val="solid"/>
           </a:ln>
         </p:spPr>
+        <p:txBody>
+          <a:bodyPr/>
+          <a:p/>
+        </p:txBody>
       </p:sp>
       <p:sp>
         <p:nvSpPr>
@@ -32314,6 +33418,10 @@
             <a:prstDash val="solid"/>
           </a:ln>
         </p:spPr>
+        <p:txBody>
+          <a:bodyPr/>
+          <a:p/>
+        </p:txBody>
       </p:sp>
       <p:sp>
         <p:nvSpPr>
@@ -32566,6 +33674,10 @@
             <a:prstDash val="solid"/>
           </a:ln>
         </p:spPr>
+        <p:txBody>
+          <a:bodyPr/>
+          <a:p/>
+        </p:txBody>
       </p:sp>
       <p:sp>
         <p:nvSpPr>
@@ -32671,6 +33783,10 @@
             <a:prstDash val="solid"/>
           </a:ln>
         </p:spPr>
+        <p:txBody>
+          <a:bodyPr/>
+          <a:p/>
+        </p:txBody>
       </p:sp>
       <p:sp>
         <p:nvSpPr>
@@ -32817,6 +33933,10 @@
             <a:prstDash val="solid"/>
           </a:ln>
         </p:spPr>
+        <p:txBody>
+          <a:bodyPr/>
+          <a:p/>
+        </p:txBody>
       </p:sp>
       <p:sp>
         <p:nvSpPr>
@@ -32963,6 +34083,10 @@
             <a:prstDash val="solid"/>
           </a:ln>
         </p:spPr>
+        <p:txBody>
+          <a:bodyPr/>
+          <a:p/>
+        </p:txBody>
       </p:sp>
       <p:sp>
         <p:nvSpPr>
@@ -33109,6 +34233,10 @@
             <a:prstDash val="solid"/>
           </a:ln>
         </p:spPr>
+        <p:txBody>
+          <a:bodyPr/>
+          <a:p/>
+        </p:txBody>
       </p:sp>
       <p:sp>
         <p:nvSpPr>
@@ -33255,6 +34383,10 @@
             <a:prstDash val="solid"/>
           </a:ln>
         </p:spPr>
+        <p:txBody>
+          <a:bodyPr/>
+          <a:p/>
+        </p:txBody>
       </p:sp>
       <p:sp>
         <p:nvSpPr>
@@ -33401,6 +34533,10 @@
             <a:prstDash val="solid"/>
           </a:ln>
         </p:spPr>
+        <p:txBody>
+          <a:bodyPr/>
+          <a:p/>
+        </p:txBody>
       </p:sp>
       <p:sp>
         <p:nvSpPr>
@@ -33646,6 +34782,10 @@
             <a:prstDash val="solid"/>
           </a:ln>
         </p:spPr>
+        <p:txBody>
+          <a:bodyPr/>
+          <a:p/>
+        </p:txBody>
       </p:sp>
       <p:sp>
         <p:nvSpPr>
@@ -33743,6 +34883,10 @@
             <a:prstDash val="solid"/>
           </a:ln>
         </p:spPr>
+        <p:txBody>
+          <a:bodyPr/>
+          <a:p/>
+        </p:txBody>
       </p:sp>
       <p:sp>
         <p:nvSpPr>
@@ -33806,6 +34950,10 @@
             <a:prstDash val="solid"/>
           </a:ln>
         </p:spPr>
+        <p:txBody>
+          <a:bodyPr/>
+          <a:p/>
+        </p:txBody>
       </p:sp>
       <p:sp>
         <p:nvSpPr>
@@ -33953,6 +35101,10 @@
             <a:prstDash val="solid"/>
           </a:ln>
         </p:spPr>
+        <p:txBody>
+          <a:bodyPr/>
+          <a:p/>
+        </p:txBody>
       </p:sp>
       <p:sp>
         <p:nvSpPr>
@@ -34205,6 +35357,10 @@
             <a:prstDash val="solid"/>
           </a:ln>
         </p:spPr>
+        <p:txBody>
+          <a:bodyPr/>
+          <a:p/>
+        </p:txBody>
       </p:sp>
       <p:sp>
         <p:nvSpPr>
@@ -34310,6 +35466,10 @@
             <a:prstDash val="solid"/>
           </a:ln>
         </p:spPr>
+        <p:txBody>
+          <a:bodyPr/>
+          <a:p/>
+        </p:txBody>
       </p:sp>
       <p:sp>
         <p:nvSpPr>
@@ -34413,6 +35573,10 @@
             <a:prstDash val="solid"/>
           </a:ln>
         </p:spPr>
+        <p:txBody>
+          <a:bodyPr/>
+          <a:p/>
+        </p:txBody>
       </p:sp>
       <p:sp>
         <p:nvSpPr>
@@ -34516,6 +35680,10 @@
             <a:prstDash val="solid"/>
           </a:ln>
         </p:spPr>
+        <p:txBody>
+          <a:bodyPr/>
+          <a:p/>
+        </p:txBody>
       </p:sp>
       <p:sp>
         <p:nvSpPr>
@@ -34619,6 +35787,10 @@
             <a:prstDash val="solid"/>
           </a:ln>
         </p:spPr>
+        <p:txBody>
+          <a:bodyPr/>
+          <a:p/>
+        </p:txBody>
       </p:sp>
       <p:sp>
         <p:nvSpPr>
@@ -34905,6 +36077,10 @@
             <a:prstDash val="solid"/>
           </a:ln>
         </p:spPr>
+        <p:txBody>
+          <a:bodyPr/>
+          <a:p/>
+        </p:txBody>
       </p:sp>
       <p:sp>
         <p:nvSpPr>
@@ -35157,6 +36333,10 @@
             <a:prstDash val="solid"/>
           </a:ln>
         </p:spPr>
+        <p:txBody>
+          <a:bodyPr/>
+          <a:p/>
+        </p:txBody>
       </p:sp>
       <p:sp>
         <p:nvSpPr>
@@ -35262,6 +36442,10 @@
             <a:prstDash val="solid"/>
           </a:ln>
         </p:spPr>
+        <p:txBody>
+          <a:bodyPr/>
+          <a:p/>
+        </p:txBody>
       </p:sp>
       <p:sp>
         <p:nvSpPr>
@@ -35365,6 +36549,10 @@
             <a:prstDash val="solid"/>
           </a:ln>
         </p:spPr>
+        <p:txBody>
+          <a:bodyPr/>
+          <a:p/>
+        </p:txBody>
       </p:sp>
       <p:sp>
         <p:nvSpPr>
@@ -35468,6 +36656,10 @@
             <a:prstDash val="solid"/>
           </a:ln>
         </p:spPr>
+        <p:txBody>
+          <a:bodyPr/>
+          <a:p/>
+        </p:txBody>
       </p:sp>
       <p:sp>
         <p:nvSpPr>
@@ -35571,6 +36763,10 @@
             <a:prstDash val="solid"/>
           </a:ln>
         </p:spPr>
+        <p:txBody>
+          <a:bodyPr/>
+          <a:p/>
+        </p:txBody>
       </p:sp>
       <p:sp>
         <p:nvSpPr>
@@ -35857,6 +37053,10 @@
             <a:prstDash val="solid"/>
           </a:ln>
         </p:spPr>
+        <p:txBody>
+          <a:bodyPr/>
+          <a:p/>
+        </p:txBody>
       </p:sp>
       <p:sp>
         <p:nvSpPr>
@@ -36109,6 +37309,10 @@
             <a:prstDash val="solid"/>
           </a:ln>
         </p:spPr>
+        <p:txBody>
+          <a:bodyPr/>
+          <a:p/>
+        </p:txBody>
       </p:sp>
       <p:sp>
         <p:nvSpPr>
@@ -36212,6 +37416,10 @@
             <a:prstDash val="solid"/>
           </a:ln>
         </p:spPr>
+        <p:txBody>
+          <a:bodyPr/>
+          <a:p/>
+        </p:txBody>
       </p:sp>
       <p:sp>
         <p:nvSpPr>
@@ -36278,6 +37486,10 @@
             <a:prstDash val="solid"/>
           </a:ln>
         </p:spPr>
+        <p:txBody>
+          <a:bodyPr/>
+          <a:p/>
+        </p:txBody>
       </p:sp>
       <p:sp>
         <p:nvSpPr>
@@ -36344,6 +37556,10 @@
             <a:prstDash val="solid"/>
           </a:ln>
         </p:spPr>
+        <p:txBody>
+          <a:bodyPr/>
+          <a:p/>
+        </p:txBody>
       </p:sp>
       <p:sp>
         <p:nvSpPr>
@@ -36410,6 +37626,10 @@
             <a:prstDash val="solid"/>
           </a:ln>
         </p:spPr>
+        <p:txBody>
+          <a:bodyPr/>
+          <a:p/>
+        </p:txBody>
       </p:sp>
       <p:sp>
         <p:nvSpPr>
@@ -36476,6 +37696,10 @@
             <a:prstDash val="solid"/>
           </a:ln>
         </p:spPr>
+        <p:txBody>
+          <a:bodyPr/>
+          <a:p/>
+        </p:txBody>
       </p:sp>
       <p:sp>
         <p:nvSpPr>
@@ -36542,6 +37766,10 @@
             <a:prstDash val="solid"/>
           </a:ln>
         </p:spPr>
+        <p:txBody>
+          <a:bodyPr/>
+          <a:p/>
+        </p:txBody>
       </p:sp>
       <p:sp>
         <p:nvSpPr>
@@ -36608,6 +37836,10 @@
             <a:prstDash val="solid"/>
           </a:ln>
         </p:spPr>
+        <p:txBody>
+          <a:bodyPr/>
+          <a:p/>
+        </p:txBody>
       </p:sp>
       <p:sp>
         <p:nvSpPr>
@@ -36674,6 +37906,10 @@
             <a:prstDash val="solid"/>
           </a:ln>
         </p:spPr>
+        <p:txBody>
+          <a:bodyPr/>
+          <a:p/>
+        </p:txBody>
       </p:sp>
       <p:sp>
         <p:nvSpPr>
@@ -36740,6 +37976,10 @@
             <a:prstDash val="solid"/>
           </a:ln>
         </p:spPr>
+        <p:txBody>
+          <a:bodyPr/>
+          <a:p/>
+        </p:txBody>
       </p:sp>
       <p:sp>
         <p:nvSpPr>
@@ -36806,6 +38046,10 @@
             <a:prstDash val="solid"/>
           </a:ln>
         </p:spPr>
+        <p:txBody>
+          <a:bodyPr/>
+          <a:p/>
+        </p:txBody>
       </p:sp>
       <p:sp>
         <p:nvSpPr>
@@ -36872,6 +38116,10 @@
             <a:prstDash val="solid"/>
           </a:ln>
         </p:spPr>
+        <p:txBody>
+          <a:bodyPr/>
+          <a:p/>
+        </p:txBody>
       </p:sp>
       <p:sp>
         <p:nvSpPr>
@@ -36938,6 +38186,10 @@
             <a:prstDash val="solid"/>
           </a:ln>
         </p:spPr>
+        <p:txBody>
+          <a:bodyPr/>
+          <a:p/>
+        </p:txBody>
       </p:sp>
       <p:sp>
         <p:nvSpPr>
@@ -37004,6 +38256,10 @@
             <a:prstDash val="solid"/>
           </a:ln>
         </p:spPr>
+        <p:txBody>
+          <a:bodyPr/>
+          <a:p/>
+        </p:txBody>
       </p:sp>
       <p:sp>
         <p:nvSpPr>
@@ -37070,6 +38326,10 @@
             <a:prstDash val="solid"/>
           </a:ln>
         </p:spPr>
+        <p:txBody>
+          <a:bodyPr/>
+          <a:p/>
+        </p:txBody>
       </p:sp>
       <p:sp>
         <p:nvSpPr>
@@ -37136,6 +38396,10 @@
             <a:prstDash val="solid"/>
           </a:ln>
         </p:spPr>
+        <p:txBody>
+          <a:bodyPr/>
+          <a:p/>
+        </p:txBody>
       </p:sp>
       <p:sp>
         <p:nvSpPr>
@@ -37202,6 +38466,10 @@
             <a:prstDash val="solid"/>
           </a:ln>
         </p:spPr>
+        <p:txBody>
+          <a:bodyPr/>
+          <a:p/>
+        </p:txBody>
       </p:sp>
       <p:sp>
         <p:nvSpPr>
@@ -37268,6 +38536,10 @@
             <a:prstDash val="solid"/>
           </a:ln>
         </p:spPr>
+        <p:txBody>
+          <a:bodyPr/>
+          <a:p/>
+        </p:txBody>
       </p:sp>
       <p:sp>
         <p:nvSpPr>
@@ -37334,6 +38606,10 @@
             <a:prstDash val="solid"/>
           </a:ln>
         </p:spPr>
+        <p:txBody>
+          <a:bodyPr/>
+          <a:p/>
+        </p:txBody>
       </p:sp>
       <p:sp>
         <p:nvSpPr>
@@ -37400,6 +38676,10 @@
             <a:prstDash val="solid"/>
           </a:ln>
         </p:spPr>
+        <p:txBody>
+          <a:bodyPr/>
+          <a:p/>
+        </p:txBody>
       </p:sp>
       <p:sp>
         <p:nvSpPr>
@@ -37466,6 +38746,10 @@
             <a:prstDash val="solid"/>
           </a:ln>
         </p:spPr>
+        <p:txBody>
+          <a:bodyPr/>
+          <a:p/>
+        </p:txBody>
       </p:sp>
       <p:sp>
         <p:nvSpPr>
@@ -37532,6 +38816,10 @@
             <a:prstDash val="solid"/>
           </a:ln>
         </p:spPr>
+        <p:txBody>
+          <a:bodyPr/>
+          <a:p/>
+        </p:txBody>
       </p:sp>
       <p:sp>
         <p:nvSpPr>
@@ -37738,6 +39026,10 @@
             <a:prstDash val="solid"/>
           </a:ln>
         </p:spPr>
+        <p:txBody>
+          <a:bodyPr/>
+          <a:p/>
+        </p:txBody>
       </p:sp>
       <p:sp>
         <p:nvSpPr>
@@ -37955,6 +39247,10 @@
             <a:prstDash val="solid"/>
           </a:ln>
         </p:spPr>
+        <p:txBody>
+          <a:bodyPr/>
+          <a:p/>
+        </p:txBody>
       </p:sp>
       <p:sp>
         <p:nvSpPr>
@@ -38271,6 +39567,10 @@
             <a:prstDash val="solid"/>
           </a:ln>
         </p:spPr>
+        <p:txBody>
+          <a:bodyPr/>
+          <a:p/>
+        </p:txBody>
       </p:sp>
       <p:sp>
         <p:nvSpPr>
@@ -38376,6 +39676,10 @@
             <a:prstDash val="solid"/>
           </a:ln>
         </p:spPr>
+        <p:txBody>
+          <a:bodyPr/>
+          <a:p/>
+        </p:txBody>
       </p:sp>
       <p:sp>
         <p:nvSpPr>
@@ -38522,6 +39826,10 @@
             <a:prstDash val="solid"/>
           </a:ln>
         </p:spPr>
+        <p:txBody>
+          <a:bodyPr/>
+          <a:p/>
+        </p:txBody>
       </p:sp>
       <p:sp>
         <p:nvSpPr>
@@ -38668,6 +39976,10 @@
             <a:prstDash val="solid"/>
           </a:ln>
         </p:spPr>
+        <p:txBody>
+          <a:bodyPr/>
+          <a:p/>
+        </p:txBody>
       </p:sp>
       <p:sp>
         <p:nvSpPr>
@@ -38814,6 +40126,10 @@
             <a:prstDash val="solid"/>
           </a:ln>
         </p:spPr>
+        <p:txBody>
+          <a:bodyPr/>
+          <a:p/>
+        </p:txBody>
       </p:sp>
       <p:sp>
         <p:nvSpPr>
@@ -38960,6 +40276,10 @@
             <a:prstDash val="solid"/>
           </a:ln>
         </p:spPr>
+        <p:txBody>
+          <a:bodyPr/>
+          <a:p/>
+        </p:txBody>
       </p:sp>
       <p:sp>
         <p:nvSpPr>
@@ -39145,6 +40465,10 @@
             <a:prstDash val="solid"/>
           </a:ln>
         </p:spPr>
+        <p:txBody>
+          <a:bodyPr/>
+          <a:p/>
+        </p:txBody>
       </p:sp>
       <p:sp>
         <p:nvSpPr>
@@ -39250,6 +40574,10 @@
             <a:prstDash val="solid"/>
           </a:ln>
         </p:spPr>
+        <p:txBody>
+          <a:bodyPr/>
+          <a:p/>
+        </p:txBody>
       </p:sp>
       <p:sp>
         <p:nvSpPr>
@@ -39355,6 +40683,10 @@
             <a:prstDash val="solid"/>
           </a:ln>
         </p:spPr>
+        <p:txBody>
+          <a:bodyPr/>
+          <a:p/>
+        </p:txBody>
       </p:sp>
       <p:sp>
         <p:nvSpPr>
@@ -39460,6 +40792,10 @@
             <a:prstDash val="solid"/>
           </a:ln>
         </p:spPr>
+        <p:txBody>
+          <a:bodyPr/>
+          <a:p/>
+        </p:txBody>
       </p:sp>
       <p:sp>
         <p:nvSpPr>
@@ -39565,6 +40901,10 @@
             <a:prstDash val="solid"/>
           </a:ln>
         </p:spPr>
+        <p:txBody>
+          <a:bodyPr/>
+          <a:p/>
+        </p:txBody>
       </p:sp>
       <p:sp>
         <p:nvSpPr>
@@ -39627,6 +40967,10 @@
             <a:prstDash val="solid"/>
           </a:ln>
         </p:spPr>
+        <p:txBody>
+          <a:bodyPr/>
+          <a:p/>
+        </p:txBody>
       </p:sp>
       <p:sp>
         <p:nvSpPr>
@@ -39792,6 +41136,10 @@
             <a:prstDash val="solid"/>
           </a:ln>
         </p:spPr>
+        <p:txBody>
+          <a:bodyPr/>
+          <a:p/>
+        </p:txBody>
       </p:sp>
       <p:sp>
         <p:nvSpPr>
@@ -40044,6 +41392,10 @@
             <a:prstDash val="solid"/>
           </a:ln>
         </p:spPr>
+        <p:txBody>
+          <a:bodyPr/>
+          <a:p/>
+        </p:txBody>
       </p:sp>
       <p:sp>
         <p:nvSpPr>
@@ -40188,6 +41540,10 @@
             <a:prstDash val="solid"/>
           </a:ln>
         </p:spPr>
+        <p:txBody>
+          <a:bodyPr/>
+          <a:p/>
+        </p:txBody>
       </p:sp>
       <p:sp>
         <p:nvSpPr>
@@ -40293,6 +41649,10 @@
             <a:prstDash val="solid"/>
           </a:ln>
         </p:spPr>
+        <p:txBody>
+          <a:bodyPr/>
+          <a:p/>
+        </p:txBody>
       </p:sp>
       <p:sp>
         <p:nvSpPr>
@@ -40398,6 +41758,10 @@
             <a:prstDash val="solid"/>
           </a:ln>
         </p:spPr>
+        <p:txBody>
+          <a:bodyPr/>
+          <a:p/>
+        </p:txBody>
       </p:sp>
       <p:sp>
         <p:nvSpPr>
@@ -40503,6 +41867,10 @@
             <a:prstDash val="solid"/>
           </a:ln>
         </p:spPr>
+        <p:txBody>
+          <a:bodyPr/>
+          <a:p/>
+        </p:txBody>
       </p:sp>
       <p:sp>
         <p:nvSpPr>
@@ -40608,6 +41976,10 @@
             <a:prstDash val="solid"/>
           </a:ln>
         </p:spPr>
+        <p:txBody>
+          <a:bodyPr/>
+          <a:p/>
+        </p:txBody>
       </p:sp>
       <p:sp>
         <p:nvSpPr>
@@ -40713,6 +42085,10 @@
             <a:prstDash val="solid"/>
           </a:ln>
         </p:spPr>
+        <p:txBody>
+          <a:bodyPr/>
+          <a:p/>
+        </p:txBody>
       </p:sp>
       <p:sp>
         <p:nvSpPr>
@@ -40818,6 +42194,10 @@
             <a:prstDash val="solid"/>
           </a:ln>
         </p:spPr>
+        <p:txBody>
+          <a:bodyPr/>
+          <a:p/>
+        </p:txBody>
       </p:sp>
       <p:sp>
         <p:nvSpPr>
@@ -40880,6 +42260,10 @@
             <a:prstDash val="solid"/>
           </a:ln>
         </p:spPr>
+        <p:txBody>
+          <a:bodyPr/>
+          <a:p/>
+        </p:txBody>
       </p:sp>
       <p:sp>
         <p:nvSpPr>
@@ -40907,6 +42291,10 @@
             <a:prstDash val="solid"/>
           </a:ln>
         </p:spPr>
+        <p:txBody>
+          <a:bodyPr/>
+          <a:p/>
+        </p:txBody>
       </p:sp>
       <p:sp>
         <p:nvSpPr>
@@ -41053,6 +42441,10 @@
             <a:prstDash val="solid"/>
           </a:ln>
         </p:spPr>
+        <p:txBody>
+          <a:bodyPr/>
+          <a:p/>
+        </p:txBody>
       </p:sp>
       <p:sp>
         <p:nvSpPr>
@@ -41337,6 +42729,10 @@
             <a:prstDash val="solid"/>
           </a:ln>
         </p:spPr>
+        <p:txBody>
+          <a:bodyPr/>
+          <a:p/>
+        </p:txBody>
       </p:sp>
       <p:sp>
         <p:nvSpPr>
@@ -41589,6 +42985,10 @@
             <a:prstDash val="solid"/>
           </a:ln>
         </p:spPr>
+        <p:txBody>
+          <a:bodyPr/>
+          <a:p/>
+        </p:txBody>
       </p:sp>
       <p:sp>
         <p:nvSpPr>
@@ -41834,6 +43234,10 @@
             <a:prstDash val="solid"/>
           </a:ln>
         </p:spPr>
+        <p:txBody>
+          <a:bodyPr/>
+          <a:p/>
+        </p:txBody>
       </p:sp>
       <p:sp>
         <p:nvSpPr>
@@ -41893,6 +43297,10 @@
             <a:prstDash val="solid"/>
           </a:ln>
         </p:spPr>
+        <p:txBody>
+          <a:bodyPr/>
+          <a:p/>
+        </p:txBody>
       </p:sp>
       <p:sp>
         <p:nvSpPr>
@@ -41952,6 +43360,10 @@
             <a:prstDash val="solid"/>
           </a:ln>
         </p:spPr>
+        <p:txBody>
+          <a:bodyPr/>
+          <a:p/>
+        </p:txBody>
       </p:sp>
       <p:sp>
         <p:nvSpPr>
@@ -42011,6 +43423,10 @@
             <a:prstDash val="solid"/>
           </a:ln>
         </p:spPr>
+        <p:txBody>
+          <a:bodyPr/>
+          <a:p/>
+        </p:txBody>
       </p:sp>
       <p:sp>
         <p:nvSpPr>
@@ -42070,6 +43486,10 @@
             <a:prstDash val="solid"/>
           </a:ln>
         </p:spPr>
+        <p:txBody>
+          <a:bodyPr/>
+          <a:p/>
+        </p:txBody>
       </p:sp>
       <p:sp>
         <p:nvSpPr>
@@ -42129,6 +43549,10 @@
             <a:prstDash val="solid"/>
           </a:ln>
         </p:spPr>
+        <p:txBody>
+          <a:bodyPr/>
+          <a:p/>
+        </p:txBody>
       </p:sp>
       <p:sp>
         <p:nvSpPr>
@@ -42188,6 +43612,10 @@
             <a:prstDash val="solid"/>
           </a:ln>
         </p:spPr>
+        <p:txBody>
+          <a:bodyPr/>
+          <a:p/>
+        </p:txBody>
       </p:sp>
       <p:sp>
         <p:nvSpPr>
@@ -42249,6 +43677,10 @@
             <a:prstDash val="solid"/>
           </a:ln>
         </p:spPr>
+        <p:txBody>
+          <a:bodyPr/>
+          <a:p/>
+        </p:txBody>
       </p:sp>
       <p:sp>
         <p:nvSpPr>
@@ -42274,6 +43706,10 @@
             <a:prstDash val="solid"/>
           </a:ln>
         </p:spPr>
+        <p:txBody>
+          <a:bodyPr/>
+          <a:p/>
+        </p:txBody>
       </p:sp>
       <p:sp>
         <p:nvSpPr>
@@ -42299,6 +43735,10 @@
             <a:prstDash val="solid"/>
           </a:ln>
         </p:spPr>
+        <p:txBody>
+          <a:bodyPr/>
+          <a:p/>
+        </p:txBody>
       </p:sp>
       <p:sp>
         <p:nvSpPr>
@@ -42324,6 +43764,10 @@
             <a:prstDash val="solid"/>
           </a:ln>
         </p:spPr>
+        <p:txBody>
+          <a:bodyPr/>
+          <a:p/>
+        </p:txBody>
       </p:sp>
       <p:sp>
         <p:nvSpPr>
@@ -42349,6 +43793,10 @@
             <a:prstDash val="solid"/>
           </a:ln>
         </p:spPr>
+        <p:txBody>
+          <a:bodyPr/>
+          <a:p/>
+        </p:txBody>
       </p:sp>
       <p:sp>
         <p:nvSpPr>
@@ -42374,6 +43822,10 @@
             <a:prstDash val="solid"/>
           </a:ln>
         </p:spPr>
+        <p:txBody>
+          <a:bodyPr/>
+          <a:p/>
+        </p:txBody>
       </p:sp>
       <p:sp>
         <p:nvSpPr>
@@ -42399,6 +43851,10 @@
             <a:prstDash val="solid"/>
           </a:ln>
         </p:spPr>
+        <p:txBody>
+          <a:bodyPr/>
+          <a:p/>
+        </p:txBody>
       </p:sp>
       <p:sp>
         <p:nvSpPr>
@@ -42465,6 +43921,10 @@
             <a:prstDash val="solid"/>
           </a:ln>
         </p:spPr>
+        <p:txBody>
+          <a:bodyPr/>
+          <a:p/>
+        </p:txBody>
       </p:sp>
       <p:sp>
         <p:nvSpPr>
@@ -42490,6 +43950,10 @@
             <a:prstDash val="solid"/>
           </a:ln>
         </p:spPr>
+        <p:txBody>
+          <a:bodyPr/>
+          <a:p/>
+        </p:txBody>
       </p:sp>
       <p:sp>
         <p:nvSpPr>
@@ -42515,6 +43979,10 @@
             <a:prstDash val="solid"/>
           </a:ln>
         </p:spPr>
+        <p:txBody>
+          <a:bodyPr/>
+          <a:p/>
+        </p:txBody>
       </p:sp>
       <p:sp>
         <p:nvSpPr>
@@ -42540,6 +44008,10 @@
             <a:prstDash val="solid"/>
           </a:ln>
         </p:spPr>
+        <p:txBody>
+          <a:bodyPr/>
+          <a:p/>
+        </p:txBody>
       </p:sp>
       <p:sp>
         <p:nvSpPr>
@@ -42565,6 +44037,10 @@
             <a:prstDash val="solid"/>
           </a:ln>
         </p:spPr>
+        <p:txBody>
+          <a:bodyPr/>
+          <a:p/>
+        </p:txBody>
       </p:sp>
       <p:sp>
         <p:nvSpPr>
@@ -42590,6 +44066,10 @@
             <a:prstDash val="solid"/>
           </a:ln>
         </p:spPr>
+        <p:txBody>
+          <a:bodyPr/>
+          <a:p/>
+        </p:txBody>
       </p:sp>
       <p:sp>
         <p:nvSpPr>
@@ -42615,6 +44095,10 @@
             <a:prstDash val="solid"/>
           </a:ln>
         </p:spPr>
+        <p:txBody>
+          <a:bodyPr/>
+          <a:p/>
+        </p:txBody>
       </p:sp>
       <p:sp>
         <p:nvSpPr>
@@ -42681,6 +44165,10 @@
             <a:prstDash val="solid"/>
           </a:ln>
         </p:spPr>
+        <p:txBody>
+          <a:bodyPr/>
+          <a:p/>
+        </p:txBody>
       </p:sp>
       <p:sp>
         <p:nvSpPr>
@@ -42706,6 +44194,10 @@
             <a:prstDash val="solid"/>
           </a:ln>
         </p:spPr>
+        <p:txBody>
+          <a:bodyPr/>
+          <a:p/>
+        </p:txBody>
       </p:sp>
       <p:sp>
         <p:nvSpPr>
@@ -42731,6 +44223,10 @@
             <a:prstDash val="solid"/>
           </a:ln>
         </p:spPr>
+        <p:txBody>
+          <a:bodyPr/>
+          <a:p/>
+        </p:txBody>
       </p:sp>
       <p:sp>
         <p:nvSpPr>
@@ -42756,6 +44252,10 @@
             <a:prstDash val="solid"/>
           </a:ln>
         </p:spPr>
+        <p:txBody>
+          <a:bodyPr/>
+          <a:p/>
+        </p:txBody>
       </p:sp>
       <p:sp>
         <p:nvSpPr>
@@ -42781,6 +44281,10 @@
             <a:prstDash val="solid"/>
           </a:ln>
         </p:spPr>
+        <p:txBody>
+          <a:bodyPr/>
+          <a:p/>
+        </p:txBody>
       </p:sp>
       <p:sp>
         <p:nvSpPr>
@@ -42806,6 +44310,10 @@
             <a:prstDash val="solid"/>
           </a:ln>
         </p:spPr>
+        <p:txBody>
+          <a:bodyPr/>
+          <a:p/>
+        </p:txBody>
       </p:sp>
       <p:sp>
         <p:nvSpPr>
@@ -42831,6 +44339,10 @@
             <a:prstDash val="solid"/>
           </a:ln>
         </p:spPr>
+        <p:txBody>
+          <a:bodyPr/>
+          <a:p/>
+        </p:txBody>
       </p:sp>
       <p:sp>
         <p:nvSpPr>
@@ -42897,6 +44409,10 @@
             <a:prstDash val="solid"/>
           </a:ln>
         </p:spPr>
+        <p:txBody>
+          <a:bodyPr/>
+          <a:p/>
+        </p:txBody>
       </p:sp>
       <p:sp>
         <p:nvSpPr>
@@ -42922,6 +44438,10 @@
             <a:prstDash val="solid"/>
           </a:ln>
         </p:spPr>
+        <p:txBody>
+          <a:bodyPr/>
+          <a:p/>
+        </p:txBody>
       </p:sp>
       <p:sp>
         <p:nvSpPr>
@@ -42947,6 +44467,10 @@
             <a:prstDash val="solid"/>
           </a:ln>
         </p:spPr>
+        <p:txBody>
+          <a:bodyPr/>
+          <a:p/>
+        </p:txBody>
       </p:sp>
       <p:sp>
         <p:nvSpPr>
@@ -42972,6 +44496,10 @@
             <a:prstDash val="solid"/>
           </a:ln>
         </p:spPr>
+        <p:txBody>
+          <a:bodyPr/>
+          <a:p/>
+        </p:txBody>
       </p:sp>
       <p:sp>
         <p:nvSpPr>
@@ -42997,6 +44525,10 @@
             <a:prstDash val="solid"/>
           </a:ln>
         </p:spPr>
+        <p:txBody>
+          <a:bodyPr/>
+          <a:p/>
+        </p:txBody>
       </p:sp>
       <p:sp>
         <p:nvSpPr>
@@ -43022,6 +44554,10 @@
             <a:prstDash val="solid"/>
           </a:ln>
         </p:spPr>
+        <p:txBody>
+          <a:bodyPr/>
+          <a:p/>
+        </p:txBody>
       </p:sp>
       <p:sp>
         <p:nvSpPr>
@@ -43047,6 +44583,10 @@
             <a:prstDash val="solid"/>
           </a:ln>
         </p:spPr>
+        <p:txBody>
+          <a:bodyPr/>
+          <a:p/>
+        </p:txBody>
       </p:sp>
       <p:sp>
         <p:nvSpPr>
@@ -43113,6 +44653,10 @@
             <a:prstDash val="solid"/>
           </a:ln>
         </p:spPr>
+        <p:txBody>
+          <a:bodyPr/>
+          <a:p/>
+        </p:txBody>
       </p:sp>
       <p:sp>
         <p:nvSpPr>
@@ -43138,6 +44682,10 @@
             <a:prstDash val="solid"/>
           </a:ln>
         </p:spPr>
+        <p:txBody>
+          <a:bodyPr/>
+          <a:p/>
+        </p:txBody>
       </p:sp>
       <p:sp>
         <p:nvSpPr>
@@ -43163,6 +44711,10 @@
             <a:prstDash val="solid"/>
           </a:ln>
         </p:spPr>
+        <p:txBody>
+          <a:bodyPr/>
+          <a:p/>
+        </p:txBody>
       </p:sp>
       <p:sp>
         <p:nvSpPr>
@@ -43188,6 +44740,10 @@
             <a:prstDash val="solid"/>
           </a:ln>
         </p:spPr>
+        <p:txBody>
+          <a:bodyPr/>
+          <a:p/>
+        </p:txBody>
       </p:sp>
       <p:sp>
         <p:nvSpPr>
@@ -43213,6 +44769,10 @@
             <a:prstDash val="solid"/>
           </a:ln>
         </p:spPr>
+        <p:txBody>
+          <a:bodyPr/>
+          <a:p/>
+        </p:txBody>
       </p:sp>
       <p:sp>
         <p:nvSpPr>
@@ -43238,6 +44798,10 @@
             <a:prstDash val="solid"/>
           </a:ln>
         </p:spPr>
+        <p:txBody>
+          <a:bodyPr/>
+          <a:p/>
+        </p:txBody>
       </p:sp>
       <p:sp>
         <p:nvSpPr>
@@ -43263,6 +44827,10 @@
             <a:prstDash val="solid"/>
           </a:ln>
         </p:spPr>
+        <p:txBody>
+          <a:bodyPr/>
+          <a:p/>
+        </p:txBody>
       </p:sp>
       <p:sp>
         <p:nvSpPr>
@@ -43329,6 +44897,10 @@
             <a:prstDash val="solid"/>
           </a:ln>
         </p:spPr>
+        <p:txBody>
+          <a:bodyPr/>
+          <a:p/>
+        </p:txBody>
       </p:sp>
       <p:sp>
         <p:nvSpPr>
@@ -43354,6 +44926,10 @@
             <a:prstDash val="solid"/>
           </a:ln>
         </p:spPr>
+        <p:txBody>
+          <a:bodyPr/>
+          <a:p/>
+        </p:txBody>
       </p:sp>
       <p:sp>
         <p:nvSpPr>
@@ -43379,6 +44955,10 @@
             <a:prstDash val="solid"/>
           </a:ln>
         </p:spPr>
+        <p:txBody>
+          <a:bodyPr/>
+          <a:p/>
+        </p:txBody>
       </p:sp>
       <p:sp>
         <p:nvSpPr>
@@ -43404,6 +44984,10 @@
             <a:prstDash val="solid"/>
           </a:ln>
         </p:spPr>
+        <p:txBody>
+          <a:bodyPr/>
+          <a:p/>
+        </p:txBody>
       </p:sp>
       <p:sp>
         <p:nvSpPr>
@@ -43429,6 +45013,10 @@
             <a:prstDash val="solid"/>
           </a:ln>
         </p:spPr>
+        <p:txBody>
+          <a:bodyPr/>
+          <a:p/>
+        </p:txBody>
       </p:sp>
       <p:sp>
         <p:nvSpPr>
@@ -43454,6 +45042,10 @@
             <a:prstDash val="solid"/>
           </a:ln>
         </p:spPr>
+        <p:txBody>
+          <a:bodyPr/>
+          <a:p/>
+        </p:txBody>
       </p:sp>
       <p:sp>
         <p:nvSpPr>
@@ -43479,6 +45071,10 @@
             <a:prstDash val="solid"/>
           </a:ln>
         </p:spPr>
+        <p:txBody>
+          <a:bodyPr/>
+          <a:p/>
+        </p:txBody>
       </p:sp>
       <p:sp>
         <p:nvSpPr>
@@ -43545,6 +45141,10 @@
             <a:prstDash val="solid"/>
           </a:ln>
         </p:spPr>
+        <p:txBody>
+          <a:bodyPr/>
+          <a:p/>
+        </p:txBody>
       </p:sp>
       <p:sp>
         <p:nvSpPr>
@@ -43570,6 +45170,10 @@
             <a:prstDash val="solid"/>
           </a:ln>
         </p:spPr>
+        <p:txBody>
+          <a:bodyPr/>
+          <a:p/>
+        </p:txBody>
       </p:sp>
       <p:sp>
         <p:nvSpPr>
@@ -43595,6 +45199,10 @@
             <a:prstDash val="solid"/>
           </a:ln>
         </p:spPr>
+        <p:txBody>
+          <a:bodyPr/>
+          <a:p/>
+        </p:txBody>
       </p:sp>
       <p:sp>
         <p:nvSpPr>
@@ -43620,6 +45228,10 @@
             <a:prstDash val="solid"/>
           </a:ln>
         </p:spPr>
+        <p:txBody>
+          <a:bodyPr/>
+          <a:p/>
+        </p:txBody>
       </p:sp>
       <p:sp>
         <p:nvSpPr>
@@ -43645,6 +45257,10 @@
             <a:prstDash val="solid"/>
           </a:ln>
         </p:spPr>
+        <p:txBody>
+          <a:bodyPr/>
+          <a:p/>
+        </p:txBody>
       </p:sp>
       <p:sp>
         <p:nvSpPr>
@@ -43670,6 +45286,10 @@
             <a:prstDash val="solid"/>
           </a:ln>
         </p:spPr>
+        <p:txBody>
+          <a:bodyPr/>
+          <a:p/>
+        </p:txBody>
       </p:sp>
       <p:sp>
         <p:nvSpPr>
@@ -43695,6 +45315,10 @@
             <a:prstDash val="solid"/>
           </a:ln>
         </p:spPr>
+        <p:txBody>
+          <a:bodyPr/>
+          <a:p/>
+        </p:txBody>
       </p:sp>
       <p:sp>
         <p:nvSpPr>
@@ -43761,6 +45385,10 @@
             <a:prstDash val="solid"/>
           </a:ln>
         </p:spPr>
+        <p:txBody>
+          <a:bodyPr/>
+          <a:p/>
+        </p:txBody>
       </p:sp>
       <p:sp>
         <p:nvSpPr>
@@ -43827,6 +45455,10 @@
             <a:prstDash val="solid"/>
           </a:ln>
         </p:spPr>
+        <p:txBody>
+          <a:bodyPr/>
+          <a:p/>
+        </p:txBody>
       </p:sp>
       <p:sp>
         <p:nvSpPr>
@@ -43893,6 +45525,10 @@
             <a:prstDash val="solid"/>
           </a:ln>
         </p:spPr>
+        <p:txBody>
+          <a:bodyPr/>
+          <a:p/>
+        </p:txBody>
       </p:sp>
       <p:sp>
         <p:nvSpPr>
@@ -43959,6 +45595,10 @@
             <a:prstDash val="solid"/>
           </a:ln>
         </p:spPr>
+        <p:txBody>
+          <a:bodyPr/>
+          <a:p/>
+        </p:txBody>
       </p:sp>
       <p:sp>
         <p:nvSpPr>
@@ -44025,6 +45665,10 @@
             <a:prstDash val="solid"/>
           </a:ln>
         </p:spPr>
+        <p:txBody>
+          <a:bodyPr/>
+          <a:p/>
+        </p:txBody>
       </p:sp>
       <p:sp>
         <p:nvSpPr>
@@ -44091,6 +45735,10 @@
             <a:prstDash val="solid"/>
           </a:ln>
         </p:spPr>
+        <p:txBody>
+          <a:bodyPr/>
+          <a:p/>
+        </p:txBody>
       </p:sp>
       <p:sp>
         <p:nvSpPr>
@@ -44157,6 +45805,10 @@
             <a:prstDash val="solid"/>
           </a:ln>
         </p:spPr>
+        <p:txBody>
+          <a:bodyPr/>
+          <a:p/>
+        </p:txBody>
       </p:sp>
       <p:sp>
         <p:nvSpPr>
@@ -44223,6 +45875,10 @@
             <a:prstDash val="solid"/>
           </a:ln>
         </p:spPr>
+        <p:txBody>
+          <a:bodyPr/>
+          <a:p/>
+        </p:txBody>
       </p:sp>
       <p:sp>
         <p:nvSpPr>
@@ -44289,6 +45945,10 @@
             <a:prstDash val="solid"/>
           </a:ln>
         </p:spPr>
+        <p:txBody>
+          <a:bodyPr/>
+          <a:p/>
+        </p:txBody>
       </p:sp>
       <p:sp>
         <p:nvSpPr>
@@ -44355,6 +46015,10 @@
             <a:prstDash val="solid"/>
           </a:ln>
         </p:spPr>
+        <p:txBody>
+          <a:bodyPr/>
+          <a:p/>
+        </p:txBody>
       </p:sp>
       <p:sp>
         <p:nvSpPr>
@@ -44421,6 +46085,10 @@
             <a:prstDash val="solid"/>
           </a:ln>
         </p:spPr>
+        <p:txBody>
+          <a:bodyPr/>
+          <a:p/>
+        </p:txBody>
       </p:sp>
       <p:sp>
         <p:nvSpPr>
@@ -44487,6 +46155,10 @@
             <a:prstDash val="solid"/>
           </a:ln>
         </p:spPr>
+        <p:txBody>
+          <a:bodyPr/>
+          <a:p/>
+        </p:txBody>
       </p:sp>
       <p:sp>
         <p:nvSpPr>
@@ -44553,6 +46225,10 @@
             <a:prstDash val="solid"/>
           </a:ln>
         </p:spPr>
+        <p:txBody>
+          <a:bodyPr/>
+          <a:p/>
+        </p:txBody>
       </p:sp>
       <p:sp>
         <p:nvSpPr>
@@ -44619,6 +46295,10 @@
             <a:prstDash val="solid"/>
           </a:ln>
         </p:spPr>
+        <p:txBody>
+          <a:bodyPr/>
+          <a:p/>
+        </p:txBody>
       </p:sp>
       <p:sp>
         <p:nvSpPr>
@@ -44685,6 +46365,10 @@
             <a:prstDash val="solid"/>
           </a:ln>
         </p:spPr>
+        <p:txBody>
+          <a:bodyPr/>
+          <a:p/>
+        </p:txBody>
       </p:sp>
       <p:sp>
         <p:nvSpPr>
@@ -44751,6 +46435,10 @@
             <a:prstDash val="solid"/>
           </a:ln>
         </p:spPr>
+        <p:txBody>
+          <a:bodyPr/>
+          <a:p/>
+        </p:txBody>
       </p:sp>
       <p:sp>
         <p:nvSpPr>
@@ -44817,6 +46505,10 @@
             <a:prstDash val="solid"/>
           </a:ln>
         </p:spPr>
+        <p:txBody>
+          <a:bodyPr/>
+          <a:p/>
+        </p:txBody>
       </p:sp>
       <p:sp>
         <p:nvSpPr>
@@ -44883,6 +46575,10 @@
             <a:prstDash val="solid"/>
           </a:ln>
         </p:spPr>
+        <p:txBody>
+          <a:bodyPr/>
+          <a:p/>
+        </p:txBody>
       </p:sp>
       <p:sp>
         <p:nvSpPr>
@@ -44949,6 +46645,10 @@
             <a:prstDash val="solid"/>
           </a:ln>
         </p:spPr>
+        <p:txBody>
+          <a:bodyPr/>
+          <a:p/>
+        </p:txBody>
       </p:sp>
       <p:sp>
         <p:nvSpPr>
@@ -45015,6 +46715,10 @@
             <a:prstDash val="solid"/>
           </a:ln>
         </p:spPr>
+        <p:txBody>
+          <a:bodyPr/>
+          <a:p/>
+        </p:txBody>
       </p:sp>
       <p:sp>
         <p:nvSpPr>
@@ -45081,6 +46785,10 @@
             <a:prstDash val="solid"/>
           </a:ln>
         </p:spPr>
+        <p:txBody>
+          <a:bodyPr/>
+          <a:p/>
+        </p:txBody>
       </p:sp>
       <p:sp>
         <p:nvSpPr>
@@ -45147,6 +46855,10 @@
             <a:prstDash val="solid"/>
           </a:ln>
         </p:spPr>
+        <p:txBody>
+          <a:bodyPr/>
+          <a:p/>
+        </p:txBody>
       </p:sp>
       <p:sp>
         <p:nvSpPr>
@@ -45213,6 +46925,10 @@
             <a:prstDash val="solid"/>
           </a:ln>
         </p:spPr>
+        <p:txBody>
+          <a:bodyPr/>
+          <a:p/>
+        </p:txBody>
       </p:sp>
       <p:sp>
         <p:nvSpPr>
@@ -45279,6 +46995,10 @@
             <a:prstDash val="solid"/>
           </a:ln>
         </p:spPr>
+        <p:txBody>
+          <a:bodyPr/>
+          <a:p/>
+        </p:txBody>
       </p:sp>
       <p:sp>
         <p:nvSpPr>
@@ -45429,6 +47149,10 @@
             <a:prstDash val="solid"/>
           </a:ln>
         </p:spPr>
+        <p:txBody>
+          <a:bodyPr/>
+          <a:p/>
+        </p:txBody>
       </p:sp>
       <p:sp>
         <p:nvSpPr>
@@ -45681,6 +47405,10 @@
             <a:prstDash val="solid"/>
           </a:ln>
         </p:spPr>
+        <p:txBody>
+          <a:bodyPr/>
+          <a:p/>
+        </p:txBody>
       </p:sp>
       <p:sp>
         <p:nvSpPr>
@@ -45786,6 +47514,10 @@
             <a:prstDash val="solid"/>
           </a:ln>
         </p:spPr>
+        <p:txBody>
+          <a:bodyPr/>
+          <a:p/>
+        </p:txBody>
       </p:sp>
       <p:sp>
         <p:nvSpPr>
@@ -45932,6 +47664,10 @@
             <a:prstDash val="solid"/>
           </a:ln>
         </p:spPr>
+        <p:txBody>
+          <a:bodyPr/>
+          <a:p/>
+        </p:txBody>
       </p:sp>
       <p:sp>
         <p:nvSpPr>
@@ -46078,6 +47814,10 @@
             <a:prstDash val="solid"/>
           </a:ln>
         </p:spPr>
+        <p:txBody>
+          <a:bodyPr/>
+          <a:p/>
+        </p:txBody>
       </p:sp>
       <p:sp>
         <p:nvSpPr>
@@ -46224,6 +47964,10 @@
             <a:prstDash val="solid"/>
           </a:ln>
         </p:spPr>
+        <p:txBody>
+          <a:bodyPr/>
+          <a:p/>
+        </p:txBody>
       </p:sp>
       <p:sp>
         <p:nvSpPr>
@@ -46368,6 +48112,10 @@
             <a:prstDash val="solid"/>
           </a:ln>
         </p:spPr>
+        <p:txBody>
+          <a:bodyPr/>
+          <a:p/>
+        </p:txBody>
       </p:sp>
       <p:sp>
         <p:nvSpPr>
@@ -46465,6 +48213,10 @@
             <a:prstDash val="solid"/>
           </a:ln>
         </p:spPr>
+        <p:txBody>
+          <a:bodyPr/>
+          <a:p/>
+        </p:txBody>
       </p:sp>
       <p:sp>
         <p:nvSpPr>
@@ -46528,6 +48280,10 @@
             <a:prstDash val="solid"/>
           </a:ln>
         </p:spPr>
+        <p:txBody>
+          <a:bodyPr/>
+          <a:p/>
+        </p:txBody>
       </p:sp>
       <p:sp>
         <p:nvSpPr>
@@ -46591,6 +48347,10 @@
             <a:prstDash val="solid"/>
           </a:ln>
         </p:spPr>
+        <p:txBody>
+          <a:bodyPr/>
+          <a:p/>
+        </p:txBody>
       </p:sp>
       <p:sp>
         <p:nvSpPr>
@@ -46654,6 +48414,10 @@
             <a:prstDash val="solid"/>
           </a:ln>
         </p:spPr>
+        <p:txBody>
+          <a:bodyPr/>
+          <a:p/>
+        </p:txBody>
       </p:sp>
       <p:sp>
         <p:nvSpPr>
@@ -46717,6 +48481,10 @@
             <a:prstDash val="solid"/>
           </a:ln>
         </p:spPr>
+        <p:txBody>
+          <a:bodyPr/>
+          <a:p/>
+        </p:txBody>
       </p:sp>
       <p:sp>
         <p:nvSpPr>
@@ -46780,6 +48548,10 @@
             <a:prstDash val="solid"/>
           </a:ln>
         </p:spPr>
+        <p:txBody>
+          <a:bodyPr/>
+          <a:p/>
+        </p:txBody>
       </p:sp>
       <p:sp>
         <p:nvSpPr>
@@ -46843,6 +48615,10 @@
             <a:prstDash val="solid"/>
           </a:ln>
         </p:spPr>
+        <p:txBody>
+          <a:bodyPr/>
+          <a:p/>
+        </p:txBody>
       </p:sp>
       <p:sp>
         <p:nvSpPr>
@@ -47046,6 +48822,10 @@
             <a:prstDash val="solid"/>
           </a:ln>
         </p:spPr>
+        <p:txBody>
+          <a:bodyPr/>
+          <a:p/>
+        </p:txBody>
       </p:sp>
       <p:sp>
         <p:nvSpPr>
@@ -47298,6 +49078,10 @@
             <a:prstDash val="solid"/>
           </a:ln>
         </p:spPr>
+        <p:txBody>
+          <a:bodyPr/>
+          <a:p/>
+        </p:txBody>
       </p:sp>
       <p:sp>
         <p:nvSpPr>
@@ -47442,6 +49226,10 @@
             <a:prstDash val="solid"/>
           </a:ln>
         </p:spPr>
+        <p:txBody>
+          <a:bodyPr/>
+          <a:p/>
+        </p:txBody>
       </p:sp>
       <p:sp>
         <p:nvSpPr>
@@ -47547,6 +49335,10 @@
             <a:prstDash val="solid"/>
           </a:ln>
         </p:spPr>
+        <p:txBody>
+          <a:bodyPr/>
+          <a:p/>
+        </p:txBody>
       </p:sp>
       <p:sp>
         <p:nvSpPr>
@@ -47652,6 +49444,10 @@
             <a:prstDash val="solid"/>
           </a:ln>
         </p:spPr>
+        <p:txBody>
+          <a:bodyPr/>
+          <a:p/>
+        </p:txBody>
       </p:sp>
       <p:sp>
         <p:nvSpPr>
@@ -47757,6 +49553,10 @@
             <a:prstDash val="solid"/>
           </a:ln>
         </p:spPr>
+        <p:txBody>
+          <a:bodyPr/>
+          <a:p/>
+        </p:txBody>
       </p:sp>
       <p:sp>
         <p:nvSpPr>
@@ -47862,6 +49662,10 @@
             <a:prstDash val="solid"/>
           </a:ln>
         </p:spPr>
+        <p:txBody>
+          <a:bodyPr/>
+          <a:p/>
+        </p:txBody>
       </p:sp>
       <p:sp>
         <p:nvSpPr>
@@ -47967,6 +49771,10 @@
             <a:prstDash val="solid"/>
           </a:ln>
         </p:spPr>
+        <p:txBody>
+          <a:bodyPr/>
+          <a:p/>
+        </p:txBody>
       </p:sp>
       <p:sp>
         <p:nvSpPr>
@@ -48072,6 +49880,10 @@
             <a:prstDash val="solid"/>
           </a:ln>
         </p:spPr>
+        <p:txBody>
+          <a:bodyPr/>
+          <a:p/>
+        </p:txBody>
       </p:sp>
       <p:sp>
         <p:nvSpPr>
@@ -48177,6 +49989,10 @@
             <a:prstDash val="solid"/>
           </a:ln>
         </p:spPr>
+        <p:txBody>
+          <a:bodyPr/>
+          <a:p/>
+        </p:txBody>
       </p:sp>
       <p:sp>
         <p:nvSpPr>
@@ -48282,6 +50098,10 @@
             <a:prstDash val="solid"/>
           </a:ln>
         </p:spPr>
+        <p:txBody>
+          <a:bodyPr/>
+          <a:p/>
+        </p:txBody>
       </p:sp>
       <p:sp>
         <p:nvSpPr>
@@ -48387,6 +50207,10 @@
             <a:prstDash val="solid"/>
           </a:ln>
         </p:spPr>
+        <p:txBody>
+          <a:bodyPr/>
+          <a:p/>
+        </p:txBody>
       </p:sp>
       <p:sp>
         <p:nvSpPr>
@@ -48492,6 +50316,10 @@
             <a:prstDash val="solid"/>
           </a:ln>
         </p:spPr>
+        <p:txBody>
+          <a:bodyPr/>
+          <a:p/>
+        </p:txBody>
       </p:sp>
       <p:sp>
         <p:nvSpPr>
@@ -48597,6 +50425,10 @@
             <a:prstDash val="solid"/>
           </a:ln>
         </p:spPr>
+        <p:txBody>
+          <a:bodyPr/>
+          <a:p/>
+        </p:txBody>
       </p:sp>
       <p:sp>
         <p:nvSpPr>
@@ -48702,6 +50534,10 @@
             <a:prstDash val="solid"/>
           </a:ln>
         </p:spPr>
+        <p:txBody>
+          <a:bodyPr/>
+          <a:p/>
+        </p:txBody>
       </p:sp>
       <p:sp>
         <p:nvSpPr>
@@ -48807,6 +50643,10 @@
             <a:prstDash val="solid"/>
           </a:ln>
         </p:spPr>
+        <p:txBody>
+          <a:bodyPr/>
+          <a:p/>
+        </p:txBody>
       </p:sp>
       <p:sp>
         <p:nvSpPr>
@@ -48869,6 +50709,10 @@
             <a:prstDash val="solid"/>
           </a:ln>
         </p:spPr>
+        <p:txBody>
+          <a:bodyPr/>
+          <a:p/>
+        </p:txBody>
       </p:sp>
       <p:sp>
         <p:nvSpPr>
@@ -49049,6 +50893,10 @@
             <a:prstDash val="solid"/>
           </a:ln>
         </p:spPr>
+        <p:txBody>
+          <a:bodyPr/>
+          <a:p/>
+        </p:txBody>
       </p:sp>
       <p:sp>
         <p:nvSpPr>
@@ -49301,6 +51149,10 @@
             <a:prstDash val="solid"/>
           </a:ln>
         </p:spPr>
+        <p:txBody>
+          <a:bodyPr/>
+          <a:p/>
+        </p:txBody>
       </p:sp>
       <p:sp>
         <p:nvSpPr>
@@ -49445,6 +51297,10 @@
             <a:prstDash val="solid"/>
           </a:ln>
         </p:spPr>
+        <p:txBody>
+          <a:bodyPr/>
+          <a:p/>
+        </p:txBody>
       </p:sp>
       <p:sp>
         <p:nvSpPr>
@@ -49550,6 +51406,10 @@
             <a:prstDash val="solid"/>
           </a:ln>
         </p:spPr>
+        <p:txBody>
+          <a:bodyPr/>
+          <a:p/>
+        </p:txBody>
       </p:sp>
       <p:sp>
         <p:nvSpPr>
@@ -49655,6 +51515,10 @@
             <a:prstDash val="solid"/>
           </a:ln>
         </p:spPr>
+        <p:txBody>
+          <a:bodyPr/>
+          <a:p/>
+        </p:txBody>
       </p:sp>
       <p:sp>
         <p:nvSpPr>
@@ -49760,6 +51624,10 @@
             <a:prstDash val="solid"/>
           </a:ln>
         </p:spPr>
+        <p:txBody>
+          <a:bodyPr/>
+          <a:p/>
+        </p:txBody>
       </p:sp>
       <p:sp>
         <p:nvSpPr>
@@ -49865,6 +51733,10 @@
             <a:prstDash val="solid"/>
           </a:ln>
         </p:spPr>
+        <p:txBody>
+          <a:bodyPr/>
+          <a:p/>
+        </p:txBody>
       </p:sp>
       <p:sp>
         <p:nvSpPr>
@@ -49970,6 +51842,10 @@
             <a:prstDash val="solid"/>
           </a:ln>
         </p:spPr>
+        <p:txBody>
+          <a:bodyPr/>
+          <a:p/>
+        </p:txBody>
       </p:sp>
       <p:sp>
         <p:nvSpPr>
@@ -50075,6 +51951,10 @@
             <a:prstDash val="solid"/>
           </a:ln>
         </p:spPr>
+        <p:txBody>
+          <a:bodyPr/>
+          <a:p/>
+        </p:txBody>
       </p:sp>
       <p:sp>
         <p:nvSpPr>
@@ -50137,6 +52017,10 @@
             <a:prstDash val="solid"/>
           </a:ln>
         </p:spPr>
+        <p:txBody>
+          <a:bodyPr/>
+          <a:p/>
+        </p:txBody>
       </p:sp>
       <p:sp>
         <p:nvSpPr>
@@ -50203,6 +52087,10 @@
             <a:prstDash val="solid"/>
           </a:ln>
         </p:spPr>
+        <p:txBody>
+          <a:bodyPr/>
+          <a:p/>
+        </p:txBody>
       </p:sp>
       <p:sp>
         <p:nvSpPr>
@@ -50308,6 +52196,10 @@
             <a:prstDash val="solid"/>
           </a:ln>
         </p:spPr>
+        <p:txBody>
+          <a:bodyPr/>
+          <a:p/>
+        </p:txBody>
       </p:sp>
       <p:sp>
         <p:nvSpPr>
@@ -50413,6 +52305,10 @@
             <a:prstDash val="solid"/>
           </a:ln>
         </p:spPr>
+        <p:txBody>
+          <a:bodyPr/>
+          <a:p/>
+        </p:txBody>
       </p:sp>
       <p:sp>
         <p:nvSpPr>
@@ -50518,6 +52414,10 @@
             <a:prstDash val="solid"/>
           </a:ln>
         </p:spPr>
+        <p:txBody>
+          <a:bodyPr/>
+          <a:p/>
+        </p:txBody>
       </p:sp>
       <p:sp>
         <p:nvSpPr>
@@ -50623,6 +52523,10 @@
             <a:prstDash val="solid"/>
           </a:ln>
         </p:spPr>
+        <p:txBody>
+          <a:bodyPr/>
+          <a:p/>
+        </p:txBody>
       </p:sp>
       <p:sp>
         <p:nvSpPr>
@@ -50728,6 +52632,10 @@
             <a:prstDash val="solid"/>
           </a:ln>
         </p:spPr>
+        <p:txBody>
+          <a:bodyPr/>
+          <a:p/>
+        </p:txBody>
       </p:sp>
       <p:sp>
         <p:nvSpPr>
@@ -50833,6 +52741,10 @@
             <a:prstDash val="solid"/>
           </a:ln>
         </p:spPr>
+        <p:txBody>
+          <a:bodyPr/>
+          <a:p/>
+        </p:txBody>
       </p:sp>
       <p:sp>
         <p:nvSpPr>
@@ -50895,6 +52807,10 @@
             <a:prstDash val="solid"/>
           </a:ln>
         </p:spPr>
+        <p:txBody>
+          <a:bodyPr/>
+          <a:p/>
+        </p:txBody>
       </p:sp>
       <p:sp>
         <p:nvSpPr>
@@ -51075,6 +52991,10 @@
             <a:prstDash val="solid"/>
           </a:ln>
         </p:spPr>
+        <p:txBody>
+          <a:bodyPr/>
+          <a:p/>
+        </p:txBody>
       </p:sp>
       <p:sp>
         <p:nvSpPr>
@@ -51327,6 +53247,10 @@
             <a:prstDash val="solid"/>
           </a:ln>
         </p:spPr>
+        <p:txBody>
+          <a:bodyPr/>
+          <a:p/>
+        </p:txBody>
       </p:sp>
       <p:sp>
         <p:nvSpPr>
@@ -51471,6 +53395,10 @@
             <a:prstDash val="solid"/>
           </a:ln>
         </p:spPr>
+        <p:txBody>
+          <a:bodyPr/>
+          <a:p/>
+        </p:txBody>
       </p:sp>
       <p:sp>
         <p:nvSpPr>
@@ -51576,6 +53504,10 @@
             <a:prstDash val="solid"/>
           </a:ln>
         </p:spPr>
+        <p:txBody>
+          <a:bodyPr/>
+          <a:p/>
+        </p:txBody>
       </p:sp>
       <p:sp>
         <p:nvSpPr>
@@ -51681,6 +53613,10 @@
             <a:prstDash val="solid"/>
           </a:ln>
         </p:spPr>
+        <p:txBody>
+          <a:bodyPr/>
+          <a:p/>
+        </p:txBody>
       </p:sp>
       <p:sp>
         <p:nvSpPr>
@@ -51786,6 +53722,10 @@
             <a:prstDash val="solid"/>
           </a:ln>
         </p:spPr>
+        <p:txBody>
+          <a:bodyPr/>
+          <a:p/>
+        </p:txBody>
       </p:sp>
       <p:sp>
         <p:nvSpPr>
@@ -51891,6 +53831,10 @@
             <a:prstDash val="solid"/>
           </a:ln>
         </p:spPr>
+        <p:txBody>
+          <a:bodyPr/>
+          <a:p/>
+        </p:txBody>
       </p:sp>
       <p:sp>
         <p:nvSpPr>
@@ -51996,6 +53940,10 @@
             <a:prstDash val="solid"/>
           </a:ln>
         </p:spPr>
+        <p:txBody>
+          <a:bodyPr/>
+          <a:p/>
+        </p:txBody>
       </p:sp>
       <p:sp>
         <p:nvSpPr>
@@ -52101,6 +54049,10 @@
             <a:prstDash val="solid"/>
           </a:ln>
         </p:spPr>
+        <p:txBody>
+          <a:bodyPr/>
+          <a:p/>
+        </p:txBody>
       </p:sp>
       <p:sp>
         <p:nvSpPr>
@@ -52206,6 +54158,10 @@
             <a:prstDash val="solid"/>
           </a:ln>
         </p:spPr>
+        <p:txBody>
+          <a:bodyPr/>
+          <a:p/>
+        </p:txBody>
       </p:sp>
       <p:sp>
         <p:nvSpPr>
@@ -52311,6 +54267,10 @@
             <a:prstDash val="solid"/>
           </a:ln>
         </p:spPr>
+        <p:txBody>
+          <a:bodyPr/>
+          <a:p/>
+        </p:txBody>
       </p:sp>
       <p:sp>
         <p:nvSpPr>
@@ -52416,6 +54376,10 @@
             <a:prstDash val="solid"/>
           </a:ln>
         </p:spPr>
+        <p:txBody>
+          <a:bodyPr/>
+          <a:p/>
+        </p:txBody>
       </p:sp>
       <p:sp>
         <p:nvSpPr>
@@ -52521,6 +54485,10 @@
             <a:prstDash val="solid"/>
           </a:ln>
         </p:spPr>
+        <p:txBody>
+          <a:bodyPr/>
+          <a:p/>
+        </p:txBody>
       </p:sp>
       <p:sp>
         <p:nvSpPr>
@@ -52626,6 +54594,10 @@
             <a:prstDash val="solid"/>
           </a:ln>
         </p:spPr>
+        <p:txBody>
+          <a:bodyPr/>
+          <a:p/>
+        </p:txBody>
       </p:sp>
       <p:sp>
         <p:nvSpPr>
@@ -52731,6 +54703,10 @@
             <a:prstDash val="solid"/>
           </a:ln>
         </p:spPr>
+        <p:txBody>
+          <a:bodyPr/>
+          <a:p/>
+        </p:txBody>
       </p:sp>
       <p:sp>
         <p:nvSpPr>
@@ -52836,6 +54812,10 @@
             <a:prstDash val="solid"/>
           </a:ln>
         </p:spPr>
+        <p:txBody>
+          <a:bodyPr/>
+          <a:p/>
+        </p:txBody>
       </p:sp>
       <p:sp>
         <p:nvSpPr>
@@ -52898,6 +54878,10 @@
             <a:prstDash val="solid"/>
           </a:ln>
         </p:spPr>
+        <p:txBody>
+          <a:bodyPr/>
+          <a:p/>
+        </p:txBody>
       </p:sp>
       <p:sp>
         <p:nvSpPr>
@@ -53078,6 +55062,10 @@
             <a:prstDash val="solid"/>
           </a:ln>
         </p:spPr>
+        <p:txBody>
+          <a:bodyPr/>
+          <a:p/>
+        </p:txBody>
       </p:sp>
       <p:sp>
         <p:nvSpPr>
